--- a/presentations/Day 3 - Foundations of Applied Machine Learning/4_classification_fundamentals.pptx
+++ b/presentations/Day 3 - Foundations of Applied Machine Learning/4_classification_fundamentals.pptx
@@ -5,7 +5,7 @@
     <p:sldMasterId id="2147483648" r:id="rId1"/>
   </p:sldMasterIdLst>
   <p:notesMasterIdLst>
-    <p:notesMasterId r:id="rId18"/>
+    <p:notesMasterId r:id="rId19"/>
   </p:notesMasterIdLst>
   <p:sldIdLst>
     <p:sldId id="256" r:id="rId2"/>
@@ -23,7 +23,8 @@
     <p:sldId id="268" r:id="rId14"/>
     <p:sldId id="269" r:id="rId15"/>
     <p:sldId id="270" r:id="rId16"/>
-    <p:sldId id="271" r:id="rId17"/>
+    <p:sldId id="272" r:id="rId17"/>
+    <p:sldId id="271" r:id="rId18"/>
   </p:sldIdLst>
   <p:sldSz cx="12192000" cy="6858000"/>
   <p:notesSz cx="6858000" cy="12192000"/>
@@ -845,6 +846,114 @@
   <p:cSld>
     <p:spTree>
       <p:nvGrpSpPr>
+        <p:cNvPr id="1" name="">
+          <a:extLst>
+            <a:ext uri="{FF2B5EF4-FFF2-40B4-BE49-F238E27FC236}">
+              <a16:creationId xmlns:a16="http://schemas.microsoft.com/office/drawing/2014/main" id="{B2068EA9-C69C-127B-4EBA-8BECBC1A2214}"/>
+            </a:ext>
+          </a:extLst>
+        </p:cNvPr>
+        <p:cNvGrpSpPr/>
+        <p:nvPr/>
+      </p:nvGrpSpPr>
+      <p:grpSpPr>
+        <a:xfrm>
+          <a:off x="0" y="0"/>
+          <a:ext cx="0" cy="0"/>
+          <a:chOff x="0" y="0"/>
+          <a:chExt cx="0" cy="0"/>
+        </a:xfrm>
+      </p:grpSpPr>
+      <p:sp>
+        <p:nvSpPr>
+          <p:cNvPr id="2" name="Slide Image Placeholder 1">
+            <a:extLst>
+              <a:ext uri="{FF2B5EF4-FFF2-40B4-BE49-F238E27FC236}">
+                <a16:creationId xmlns:a16="http://schemas.microsoft.com/office/drawing/2014/main" id="{87F4B645-E362-F8A8-EA6B-9B1D92258ADA}"/>
+              </a:ext>
+            </a:extLst>
+          </p:cNvPr>
+          <p:cNvSpPr>
+            <a:spLocks noGrp="1" noRot="1" noChangeAspect="1"/>
+          </p:cNvSpPr>
+          <p:nvPr>
+            <p:ph type="sldImg"/>
+          </p:nvPr>
+        </p:nvSpPr>
+        <p:spPr/>
+      </p:sp>
+      <p:sp>
+        <p:nvSpPr>
+          <p:cNvPr id="3" name="Notes Placeholder 2">
+            <a:extLst>
+              <a:ext uri="{FF2B5EF4-FFF2-40B4-BE49-F238E27FC236}">
+                <a16:creationId xmlns:a16="http://schemas.microsoft.com/office/drawing/2014/main" id="{3BE541BA-B9CC-B403-11F8-32BF58500E52}"/>
+              </a:ext>
+            </a:extLst>
+          </p:cNvPr>
+          <p:cNvSpPr>
+            <a:spLocks noGrp="1"/>
+          </p:cNvSpPr>
+          <p:nvPr>
+            <p:ph type="body" idx="1"/>
+          </p:nvPr>
+        </p:nvSpPr>
+        <p:spPr/>
+        <p:txBody>
+          <a:bodyPr/>
+          <a:lstStyle/>
+          <a:p>
+            <a:endParaRPr lang="en-US" dirty="0"/>
+          </a:p>
+        </p:txBody>
+      </p:sp>
+      <p:sp>
+        <p:nvSpPr>
+          <p:cNvPr id="4" name="Slide Number Placeholder 3">
+            <a:extLst>
+              <a:ext uri="{FF2B5EF4-FFF2-40B4-BE49-F238E27FC236}">
+                <a16:creationId xmlns:a16="http://schemas.microsoft.com/office/drawing/2014/main" id="{8E40D0BB-F817-6784-DE5B-1186DB86DE4D}"/>
+              </a:ext>
+            </a:extLst>
+          </p:cNvPr>
+          <p:cNvSpPr>
+            <a:spLocks noGrp="1"/>
+          </p:cNvSpPr>
+          <p:nvPr>
+            <p:ph type="sldNum" sz="quarter" idx="10"/>
+          </p:nvPr>
+        </p:nvSpPr>
+        <p:spPr/>
+        <p:txBody>
+          <a:bodyPr/>
+          <a:lstStyle/>
+          <a:p>
+            <a:fld id="{F7021451-1387-4CA6-816F-3879F97B5CBC}" type="slidenum">
+              <a:rPr lang="en-US"/>
+              <a:t>16</a:t>
+            </a:fld>
+            <a:endParaRPr lang="en-US"/>
+          </a:p>
+        </p:txBody>
+      </p:sp>
+    </p:spTree>
+    <p:extLst>
+      <p:ext uri="{BB962C8B-B14F-4D97-AF65-F5344CB8AC3E}">
+        <p14:creationId xmlns:p14="http://schemas.microsoft.com/office/powerpoint/2010/main" val="3426966311"/>
+      </p:ext>
+    </p:extLst>
+  </p:cSld>
+  <p:clrMapOvr>
+    <a:masterClrMapping/>
+  </p:clrMapOvr>
+</p:notes>
+</file>
+
+<file path=ppt/notesSlides/notesSlide17.xml><?xml version="1.0" encoding="utf-8"?>
+<p:notes xmlns:a="http://schemas.openxmlformats.org/drawingml/2006/main" xmlns:r="http://schemas.openxmlformats.org/officeDocument/2006/relationships" xmlns:p="http://schemas.openxmlformats.org/presentationml/2006/main">
+  <p:cSld>
+    <p:spTree>
+      <p:nvGrpSpPr>
         <p:cNvPr id="1" name=""/>
         <p:cNvGrpSpPr/>
         <p:nvPr/>
@@ -905,7 +1014,7 @@
           <a:p>
             <a:fld id="{F7021451-1387-4CA6-816F-3879F97B5CBC}" type="slidenum">
               <a:rPr lang="en-US"/>
-              <a:t>16</a:t>
+              <a:t>17</a:t>
             </a:fld>
             <a:endParaRPr lang="en-US"/>
           </a:p>
@@ -7003,14 +7112,92 @@
       </p:sp>
       <p:sp>
         <p:nvSpPr>
-          <p:cNvPr id="4" name="Text 2"/>
-          <p:cNvSpPr/>
-          <p:nvPr/>
-        </p:nvSpPr>
-        <p:spPr>
-          <a:xfrm>
-            <a:off x="502920" y="621792"/>
-            <a:ext cx="8961120" cy="475488"/>
+          <p:cNvPr id="5" name="Text 3"/>
+          <p:cNvSpPr/>
+          <p:nvPr/>
+        </p:nvSpPr>
+        <p:spPr>
+          <a:xfrm>
+            <a:off x="10561320" y="420624"/>
+            <a:ext cx="1097280" cy="292608"/>
+          </a:xfrm>
+          <a:prstGeom prst="rect">
+            <a:avLst/>
+          </a:prstGeom>
+          <a:noFill/>
+          <a:ln/>
+        </p:spPr>
+        <p:txBody>
+          <a:bodyPr wrap="square" lIns="0" tIns="0" rIns="0" bIns="0" rtlCol="0" anchor="ctr"/>
+          <a:lstStyle/>
+          <a:p>
+            <a:pPr marL="0" indent="0" algn="r">
+              <a:buNone/>
+            </a:pPr>
+            <a:r>
+              <a:rPr lang="en-US" sz="1000" dirty="0">
+                <a:solidFill>
+                  <a:srgbClr val="6B7280"/>
+                </a:solidFill>
+              </a:rPr>
+              <a:t>Session 4</a:t>
+            </a:r>
+            <a:endParaRPr lang="en-US" sz="1000" dirty="0"/>
+          </a:p>
+        </p:txBody>
+      </p:sp>
+      <p:sp>
+        <p:nvSpPr>
+          <p:cNvPr id="23" name="Text 21"/>
+          <p:cNvSpPr/>
+          <p:nvPr/>
+        </p:nvSpPr>
+        <p:spPr>
+          <a:xfrm>
+            <a:off x="11539728" y="6446520"/>
+            <a:ext cx="274320" cy="182880"/>
+          </a:xfrm>
+          <a:prstGeom prst="rect">
+            <a:avLst/>
+          </a:prstGeom>
+          <a:noFill/>
+          <a:ln/>
+        </p:spPr>
+        <p:txBody>
+          <a:bodyPr wrap="square" lIns="0" tIns="0" rIns="0" bIns="0" rtlCol="0" anchor="ctr"/>
+          <a:lstStyle/>
+          <a:p>
+            <a:pPr marL="0" indent="0" algn="r">
+              <a:buNone/>
+            </a:pPr>
+            <a:r>
+              <a:rPr lang="en-US" sz="800" dirty="0">
+                <a:solidFill>
+                  <a:srgbClr val="9CA3AF"/>
+                </a:solidFill>
+              </a:rPr>
+              <a:t>15</a:t>
+            </a:r>
+            <a:endParaRPr lang="en-US" sz="800" dirty="0"/>
+          </a:p>
+        </p:txBody>
+      </p:sp>
+      <p:sp>
+        <p:nvSpPr>
+          <p:cNvPr id="22" name="Text 0">
+            <a:extLst>
+              <a:ext uri="{FF2B5EF4-FFF2-40B4-BE49-F238E27FC236}">
+                <a16:creationId xmlns:a16="http://schemas.microsoft.com/office/drawing/2014/main" id="{C6281735-823F-19F5-42F7-328E6A62CC4D}"/>
+              </a:ext>
+            </a:extLst>
+          </p:cNvPr>
+          <p:cNvSpPr/>
+          <p:nvPr/>
+        </p:nvSpPr>
+        <p:spPr>
+          <a:xfrm>
+            <a:off x="502920" y="1121887"/>
+            <a:ext cx="10789920" cy="457200"/>
           </a:xfrm>
           <a:prstGeom prst="rect">
             <a:avLst/>
@@ -7028,150 +7215,92 @@
               <a:buNone/>
             </a:pPr>
             <a:r>
-              <a:rPr lang="en-US" sz="2400" b="1" dirty="0">
-                <a:solidFill>
-                  <a:srgbClr val="1F2937"/>
+              <a:rPr lang="en-US" sz="2500" b="1" dirty="0">
+                <a:solidFill>
+                  <a:srgbClr val="12355B"/>
                 </a:solidFill>
                 <a:latin typeface="Aptos Display" pitchFamily="34" charset="0"/>
                 <a:ea typeface="Aptos Display" pitchFamily="34" charset="-122"/>
                 <a:cs typeface="Aptos Display" pitchFamily="34" charset="-120"/>
               </a:rPr>
-              <a:t>Classification Examples Datasets</a:t>
-            </a:r>
-            <a:endParaRPr lang="en-US" sz="2400" dirty="0"/>
-          </a:p>
-        </p:txBody>
-      </p:sp>
-      <p:sp>
-        <p:nvSpPr>
-          <p:cNvPr id="5" name="Text 3"/>
-          <p:cNvSpPr/>
-          <p:nvPr/>
-        </p:nvSpPr>
-        <p:spPr>
-          <a:xfrm>
-            <a:off x="10561320" y="420624"/>
-            <a:ext cx="1097280" cy="292608"/>
-          </a:xfrm>
-          <a:prstGeom prst="rect">
-            <a:avLst/>
-          </a:prstGeom>
-          <a:noFill/>
-          <a:ln/>
-        </p:spPr>
-        <p:txBody>
-          <a:bodyPr wrap="square" lIns="0" tIns="0" rIns="0" bIns="0" rtlCol="0" anchor="ctr"/>
-          <a:lstStyle/>
-          <a:p>
-            <a:pPr marL="0" indent="0" algn="r">
-              <a:buNone/>
-            </a:pPr>
-            <a:r>
-              <a:rPr lang="en-US" sz="1000" dirty="0">
-                <a:solidFill>
-                  <a:srgbClr val="6B7280"/>
-                </a:solidFill>
-              </a:rPr>
-              <a:t>Session 4</a:t>
-            </a:r>
-            <a:endParaRPr lang="en-US" sz="1000" dirty="0"/>
-          </a:p>
-        </p:txBody>
-      </p:sp>
-      <p:sp>
-        <p:nvSpPr>
-          <p:cNvPr id="6" name="Text 4"/>
-          <p:cNvSpPr/>
-          <p:nvPr/>
-        </p:nvSpPr>
-        <p:spPr>
-          <a:xfrm>
-            <a:off x="868680" y="1325880"/>
-            <a:ext cx="1508760" cy="256032"/>
-          </a:xfrm>
-          <a:prstGeom prst="rect">
-            <a:avLst/>
-          </a:prstGeom>
-          <a:noFill/>
-          <a:ln/>
-        </p:spPr>
-        <p:txBody>
-          <a:bodyPr wrap="square" lIns="254" tIns="254" rIns="254" bIns="254" rtlCol="0" anchor="t">
+              <a:t>Session 4 technical skill: minimal classification workflow</a:t>
+            </a:r>
+            <a:endParaRPr lang="en-US" sz="2500" dirty="0"/>
+          </a:p>
+        </p:txBody>
+      </p:sp>
+      <p:sp>
+        <p:nvSpPr>
+          <p:cNvPr id="25" name="Text 1">
+            <a:extLst>
+              <a:ext uri="{FF2B5EF4-FFF2-40B4-BE49-F238E27FC236}">
+                <a16:creationId xmlns:a16="http://schemas.microsoft.com/office/drawing/2014/main" id="{14B6195B-EBE0-8671-A676-2CA0AA89DA5C}"/>
+              </a:ext>
+            </a:extLst>
+          </p:cNvPr>
+          <p:cNvSpPr/>
+          <p:nvPr/>
+        </p:nvSpPr>
+        <p:spPr>
+          <a:xfrm>
+            <a:off x="521208" y="1643095"/>
+            <a:ext cx="10241280" cy="320040"/>
+          </a:xfrm>
+          <a:prstGeom prst="rect">
+            <a:avLst/>
+          </a:prstGeom>
+          <a:noFill/>
+          <a:ln/>
+        </p:spPr>
+        <p:txBody>
+          <a:bodyPr wrap="square" lIns="0" tIns="0" rIns="0" bIns="0" rtlCol="0" anchor="ctr">
             <a:normAutofit/>
           </a:bodyPr>
           <a:lstStyle/>
           <a:p>
-            <a:pPr marL="0" indent="0" algn="l">
-              <a:buNone/>
-            </a:pPr>
-            <a:r>
-              <a:rPr lang="en-US" sz="1600" b="1" dirty="0">
-                <a:solidFill>
-                  <a:srgbClr val="C8102E"/>
-                </a:solidFill>
-              </a:rPr>
-              <a:t>Manufacturing</a:t>
-            </a:r>
-            <a:endParaRPr lang="en-US" sz="1600" dirty="0"/>
-          </a:p>
-        </p:txBody>
-      </p:sp>
-      <p:sp>
-        <p:nvSpPr>
-          <p:cNvPr id="7" name="Text 5"/>
-          <p:cNvSpPr/>
-          <p:nvPr/>
-        </p:nvSpPr>
-        <p:spPr>
-          <a:xfrm>
-            <a:off x="3154680" y="1325880"/>
-            <a:ext cx="7772400" cy="292608"/>
-          </a:xfrm>
-          <a:prstGeom prst="rect">
-            <a:avLst/>
-          </a:prstGeom>
-          <a:noFill/>
-          <a:ln/>
-        </p:spPr>
-        <p:txBody>
-          <a:bodyPr wrap="square" lIns="254" tIns="254" rIns="254" bIns="254" rtlCol="0" anchor="t">
-            <a:normAutofit fontScale="92500"/>
-          </a:bodyPr>
-          <a:lstStyle/>
-          <a:p>
-            <a:pPr marL="0" indent="0" algn="l">
-              <a:buNone/>
-            </a:pPr>
-            <a:r>
-              <a:rPr lang="en-US" sz="1500" dirty="0">
-                <a:solidFill>
-                  <a:srgbClr val="1F2937"/>
-                </a:solidFill>
-              </a:rPr>
-              <a:t>Classify product acceptability, defect type, machine state, or process condition from measurements.</a:t>
-            </a:r>
-            <a:endParaRPr lang="en-US" sz="1500" dirty="0"/>
-          </a:p>
-        </p:txBody>
-      </p:sp>
-      <p:sp>
-        <p:nvSpPr>
-          <p:cNvPr id="8" name="Shape 6"/>
-          <p:cNvSpPr/>
-          <p:nvPr/>
-        </p:nvSpPr>
-        <p:spPr>
-          <a:xfrm>
-            <a:off x="822960" y="1737360"/>
-            <a:ext cx="10515600" cy="0"/>
-          </a:xfrm>
-          <a:prstGeom prst="line">
-            <a:avLst/>
-          </a:prstGeom>
-          <a:noFill/>
-          <a:ln w="10160">
+            <a:pPr marL="0" indent="0">
+              <a:buNone/>
+            </a:pPr>
+            <a:r>
+              <a:rPr lang="en-US" sz="1150" dirty="0">
+                <a:solidFill>
+                  <a:srgbClr val="4B5563"/>
+                </a:solidFill>
+              </a:rPr>
+              <a:t>Goal: compare a majority-class baseline with logistic regression using classification metrics.</a:t>
+            </a:r>
+            <a:endParaRPr lang="en-US" sz="1150" dirty="0"/>
+          </a:p>
+        </p:txBody>
+      </p:sp>
+      <p:sp>
+        <p:nvSpPr>
+          <p:cNvPr id="27" name="Shape 2">
+            <a:extLst>
+              <a:ext uri="{FF2B5EF4-FFF2-40B4-BE49-F238E27FC236}">
+                <a16:creationId xmlns:a16="http://schemas.microsoft.com/office/drawing/2014/main" id="{EC2EEF0D-C0B8-2F3C-1274-3F414B5F4A10}"/>
+              </a:ext>
+            </a:extLst>
+          </p:cNvPr>
+          <p:cNvSpPr/>
+          <p:nvPr/>
+        </p:nvSpPr>
+        <p:spPr>
+          <a:xfrm>
+            <a:off x="640080" y="2036287"/>
+            <a:ext cx="5394960" cy="2057400"/>
+          </a:xfrm>
+          <a:prstGeom prst="roundRect">
+            <a:avLst>
+              <a:gd name="adj" fmla="val 2667"/>
+            </a:avLst>
+          </a:prstGeom>
+          <a:solidFill>
+            <a:srgbClr val="111827"/>
+          </a:solidFill>
+          <a:ln w="12700">
             <a:solidFill>
-              <a:srgbClr val="E5E7EB"/>
+              <a:srgbClr val="111827"/>
             </a:solidFill>
             <a:prstDash val="solid"/>
           </a:ln>
@@ -7186,98 +7315,153 @@
       </p:sp>
       <p:sp>
         <p:nvSpPr>
-          <p:cNvPr id="9" name="Text 7"/>
-          <p:cNvSpPr/>
-          <p:nvPr/>
-        </p:nvSpPr>
-        <p:spPr>
-          <a:xfrm>
-            <a:off x="868680" y="2148840"/>
-            <a:ext cx="1508760" cy="256032"/>
-          </a:xfrm>
-          <a:prstGeom prst="rect">
-            <a:avLst/>
-          </a:prstGeom>
-          <a:noFill/>
-          <a:ln/>
-        </p:spPr>
-        <p:txBody>
-          <a:bodyPr wrap="square" lIns="254" tIns="254" rIns="254" bIns="254" rtlCol="0" anchor="t">
+          <p:cNvPr id="29" name="Text 3">
+            <a:extLst>
+              <a:ext uri="{FF2B5EF4-FFF2-40B4-BE49-F238E27FC236}">
+                <a16:creationId xmlns:a16="http://schemas.microsoft.com/office/drawing/2014/main" id="{AC7229A9-B141-B575-35C5-5601502D3F1F}"/>
+              </a:ext>
+            </a:extLst>
+          </p:cNvPr>
+          <p:cNvSpPr/>
+          <p:nvPr/>
+        </p:nvSpPr>
+        <p:spPr>
+          <a:xfrm>
+            <a:off x="804672" y="2164303"/>
+            <a:ext cx="5065776" cy="1801368"/>
+          </a:xfrm>
+          <a:prstGeom prst="rect">
+            <a:avLst/>
+          </a:prstGeom>
+          <a:noFill/>
+          <a:ln/>
+        </p:spPr>
+        <p:txBody>
+          <a:bodyPr wrap="square" lIns="254" tIns="254" rIns="254" bIns="254" rtlCol="0" anchor="ctr">
             <a:normAutofit/>
           </a:bodyPr>
           <a:lstStyle/>
           <a:p>
-            <a:pPr marL="0" indent="0" algn="l">
-              <a:buNone/>
-            </a:pPr>
-            <a:r>
-              <a:rPr lang="en-US" sz="1600" b="1" dirty="0">
-                <a:solidFill>
-                  <a:srgbClr val="C8102E"/>
-                </a:solidFill>
-              </a:rPr>
-              <a:t>Bioprocessing</a:t>
-            </a:r>
-            <a:endParaRPr lang="en-US" sz="1600" dirty="0"/>
-          </a:p>
-        </p:txBody>
-      </p:sp>
-      <p:sp>
-        <p:nvSpPr>
-          <p:cNvPr id="10" name="Text 8"/>
-          <p:cNvSpPr/>
-          <p:nvPr/>
-        </p:nvSpPr>
-        <p:spPr>
-          <a:xfrm>
-            <a:off x="3154680" y="2148840"/>
-            <a:ext cx="7772400" cy="292608"/>
-          </a:xfrm>
-          <a:prstGeom prst="rect">
-            <a:avLst/>
-          </a:prstGeom>
-          <a:noFill/>
-          <a:ln/>
-        </p:spPr>
-        <p:txBody>
-          <a:bodyPr wrap="square" lIns="254" tIns="254" rIns="254" bIns="254" rtlCol="0" anchor="t">
-            <a:normAutofit fontScale="92500"/>
-          </a:bodyPr>
-          <a:lstStyle/>
-          <a:p>
-            <a:pPr marL="0" indent="0" algn="l">
-              <a:buNone/>
-            </a:pPr>
-            <a:r>
-              <a:rPr lang="en-US" sz="1500" dirty="0">
-                <a:solidFill>
-                  <a:srgbClr val="1F2937"/>
-                </a:solidFill>
-              </a:rPr>
-              <a:t>Classify growth phase, contamination risk, or abnormal operating state from sensor summaries.</a:t>
-            </a:r>
-            <a:endParaRPr lang="en-US" sz="1500" dirty="0"/>
-          </a:p>
-        </p:txBody>
-      </p:sp>
-      <p:sp>
-        <p:nvSpPr>
-          <p:cNvPr id="11" name="Shape 9"/>
-          <p:cNvSpPr/>
-          <p:nvPr/>
-        </p:nvSpPr>
-        <p:spPr>
-          <a:xfrm>
-            <a:off x="822960" y="2560320"/>
-            <a:ext cx="10515600" cy="0"/>
-          </a:xfrm>
-          <a:prstGeom prst="line">
-            <a:avLst/>
-          </a:prstGeom>
-          <a:noFill/>
-          <a:ln w="10160">
+            <a:pPr marL="0" indent="0">
+              <a:buNone/>
+            </a:pPr>
+            <a:r>
+              <a:rPr lang="en-US" sz="820" dirty="0">
+                <a:solidFill>
+                  <a:srgbClr val="E5E7EB"/>
+                </a:solidFill>
+                <a:latin typeface="Cascadia Mono" pitchFamily="34" charset="0"/>
+                <a:ea typeface="Cascadia Mono" pitchFamily="34" charset="-122"/>
+                <a:cs typeface="Cascadia Mono" pitchFamily="34" charset="-120"/>
+              </a:rPr>
+              <a:t>from sklearn.linear_model import LogisticRegression</a:t>
+            </a:r>
+            <a:endParaRPr lang="en-US" sz="820" dirty="0"/>
+          </a:p>
+          <a:p>
+            <a:pPr marL="0" indent="0">
+              <a:buNone/>
+            </a:pPr>
+            <a:r>
+              <a:rPr lang="en-US" sz="820" dirty="0">
+                <a:solidFill>
+                  <a:srgbClr val="E5E7EB"/>
+                </a:solidFill>
+                <a:latin typeface="Cascadia Mono" pitchFamily="34" charset="0"/>
+                <a:ea typeface="Cascadia Mono" pitchFamily="34" charset="-122"/>
+                <a:cs typeface="Cascadia Mono" pitchFamily="34" charset="-120"/>
+              </a:rPr>
+              <a:t>from sklearn.metrics import accuracy_score, precision_score, recall_score, f1_score, confusion_matrix</a:t>
+            </a:r>
+            <a:endParaRPr lang="en-US" sz="820" dirty="0"/>
+          </a:p>
+          <a:p>
+            <a:pPr marL="0" indent="0">
+              <a:buNone/>
+            </a:pPr>
+            <a:endParaRPr lang="en-US" sz="820" dirty="0"/>
+          </a:p>
+          <a:p>
+            <a:pPr marL="0" indent="0">
+              <a:buNone/>
+            </a:pPr>
+            <a:r>
+              <a:rPr lang="en-US" sz="820" dirty="0">
+                <a:solidFill>
+                  <a:srgbClr val="E5E7EB"/>
+                </a:solidFill>
+                <a:latin typeface="Cascadia Mono" pitchFamily="34" charset="0"/>
+                <a:ea typeface="Cascadia Mono" pitchFamily="34" charset="-122"/>
+                <a:cs typeface="Cascadia Mono" pitchFamily="34" charset="-120"/>
+              </a:rPr>
+              <a:t>X = df[features]</a:t>
+            </a:r>
+            <a:endParaRPr lang="en-US" sz="820" dirty="0"/>
+          </a:p>
+          <a:p>
+            <a:pPr marL="0" indent="0">
+              <a:buNone/>
+            </a:pPr>
+            <a:r>
+              <a:rPr lang="en-US" sz="820" dirty="0">
+                <a:solidFill>
+                  <a:srgbClr val="E5E7EB"/>
+                </a:solidFill>
+                <a:latin typeface="Cascadia Mono" pitchFamily="34" charset="0"/>
+                <a:ea typeface="Cascadia Mono" pitchFamily="34" charset="-122"/>
+                <a:cs typeface="Cascadia Mono" pitchFamily="34" charset="-120"/>
+              </a:rPr>
+              <a:t>y = df["defect"]</a:t>
+            </a:r>
+            <a:endParaRPr lang="en-US" sz="820" dirty="0"/>
+          </a:p>
+          <a:p>
+            <a:pPr marL="0" indent="0">
+              <a:buNone/>
+            </a:pPr>
+            <a:r>
+              <a:rPr lang="en-US" sz="820" dirty="0">
+                <a:solidFill>
+                  <a:srgbClr val="E5E7EB"/>
+                </a:solidFill>
+                <a:latin typeface="Cascadia Mono" pitchFamily="34" charset="0"/>
+                <a:ea typeface="Cascadia Mono" pitchFamily="34" charset="-122"/>
+                <a:cs typeface="Cascadia Mono" pitchFamily="34" charset="-120"/>
+              </a:rPr>
+              <a:t>X_train, X_test, y_train, y_test = train_test_split(X, y, stratify=y, random_state=42)</a:t>
+            </a:r>
+            <a:endParaRPr lang="en-US" sz="820" dirty="0"/>
+          </a:p>
+        </p:txBody>
+      </p:sp>
+      <p:sp>
+        <p:nvSpPr>
+          <p:cNvPr id="31" name="Shape 4">
+            <a:extLst>
+              <a:ext uri="{FF2B5EF4-FFF2-40B4-BE49-F238E27FC236}">
+                <a16:creationId xmlns:a16="http://schemas.microsoft.com/office/drawing/2014/main" id="{2FCF3615-911E-CE0E-08BA-5F55DBA679D7}"/>
+              </a:ext>
+            </a:extLst>
+          </p:cNvPr>
+          <p:cNvSpPr/>
+          <p:nvPr/>
+        </p:nvSpPr>
+        <p:spPr>
+          <a:xfrm>
+            <a:off x="6309360" y="2036287"/>
+            <a:ext cx="5029200" cy="2057400"/>
+          </a:xfrm>
+          <a:prstGeom prst="roundRect">
+            <a:avLst>
+              <a:gd name="adj" fmla="val 2667"/>
+            </a:avLst>
+          </a:prstGeom>
+          <a:solidFill>
+            <a:srgbClr val="111827"/>
+          </a:solidFill>
+          <a:ln w="12700">
             <a:solidFill>
-              <a:srgbClr val="E5E7EB"/>
+              <a:srgbClr val="111827"/>
             </a:solidFill>
             <a:prstDash val="solid"/>
           </a:ln>
@@ -7292,98 +7476,272 @@
       </p:sp>
       <p:sp>
         <p:nvSpPr>
-          <p:cNvPr id="12" name="Text 10"/>
-          <p:cNvSpPr/>
-          <p:nvPr/>
-        </p:nvSpPr>
-        <p:spPr>
-          <a:xfrm>
-            <a:off x="868680" y="2971800"/>
-            <a:ext cx="1508760" cy="256032"/>
-          </a:xfrm>
-          <a:prstGeom prst="rect">
-            <a:avLst/>
-          </a:prstGeom>
-          <a:noFill/>
-          <a:ln/>
-        </p:spPr>
-        <p:txBody>
-          <a:bodyPr wrap="square" lIns="254" tIns="254" rIns="254" bIns="254" rtlCol="0" anchor="t">
+          <p:cNvPr id="33" name="Text 5">
+            <a:extLst>
+              <a:ext uri="{FF2B5EF4-FFF2-40B4-BE49-F238E27FC236}">
+                <a16:creationId xmlns:a16="http://schemas.microsoft.com/office/drawing/2014/main" id="{83C2D0F4-FAF8-76AD-F73B-83107D2E9F29}"/>
+              </a:ext>
+            </a:extLst>
+          </p:cNvPr>
+          <p:cNvSpPr/>
+          <p:nvPr/>
+        </p:nvSpPr>
+        <p:spPr>
+          <a:xfrm>
+            <a:off x="6473952" y="2164303"/>
+            <a:ext cx="4700016" cy="1801368"/>
+          </a:xfrm>
+          <a:prstGeom prst="rect">
+            <a:avLst/>
+          </a:prstGeom>
+          <a:noFill/>
+          <a:ln/>
+        </p:spPr>
+        <p:txBody>
+          <a:bodyPr wrap="square" lIns="254" tIns="254" rIns="254" bIns="254" rtlCol="0" anchor="ctr">
             <a:normAutofit/>
           </a:bodyPr>
           <a:lstStyle/>
           <a:p>
-            <a:pPr marL="0" indent="0" algn="l">
-              <a:buNone/>
-            </a:pPr>
-            <a:r>
-              <a:rPr lang="en-US" sz="1600" b="1" dirty="0">
-                <a:solidFill>
-                  <a:srgbClr val="C8102E"/>
-                </a:solidFill>
-              </a:rPr>
-              <a:t>Buildings</a:t>
-            </a:r>
-            <a:endParaRPr lang="en-US" sz="1600" dirty="0"/>
-          </a:p>
-        </p:txBody>
-      </p:sp>
-      <p:sp>
-        <p:nvSpPr>
-          <p:cNvPr id="13" name="Text 11"/>
-          <p:cNvSpPr/>
-          <p:nvPr/>
-        </p:nvSpPr>
-        <p:spPr>
-          <a:xfrm>
-            <a:off x="3154680" y="2971800"/>
-            <a:ext cx="7772400" cy="292608"/>
-          </a:xfrm>
-          <a:prstGeom prst="rect">
-            <a:avLst/>
-          </a:prstGeom>
-          <a:noFill/>
-          <a:ln/>
-        </p:spPr>
-        <p:txBody>
-          <a:bodyPr wrap="square" lIns="254" tIns="254" rIns="254" bIns="254" rtlCol="0" anchor="t">
+            <a:pPr marL="0" indent="0">
+              <a:buNone/>
+            </a:pPr>
+            <a:r>
+              <a:rPr lang="en-US" sz="850" dirty="0">
+                <a:solidFill>
+                  <a:srgbClr val="E5E7EB"/>
+                </a:solidFill>
+                <a:latin typeface="Cascadia Mono" pitchFamily="34" charset="0"/>
+                <a:ea typeface="Cascadia Mono" pitchFamily="34" charset="-122"/>
+                <a:cs typeface="Cascadia Mono" pitchFamily="34" charset="-120"/>
+              </a:rPr>
+              <a:t>baseline = np.full(len(y_test), y_train.mode()[0])</a:t>
+            </a:r>
+            <a:endParaRPr lang="en-US" sz="850" dirty="0"/>
+          </a:p>
+          <a:p>
+            <a:pPr marL="0" indent="0">
+              <a:buNone/>
+            </a:pPr>
+            <a:r>
+              <a:rPr lang="en-US" sz="850" dirty="0">
+                <a:solidFill>
+                  <a:srgbClr val="E5E7EB"/>
+                </a:solidFill>
+                <a:latin typeface="Cascadia Mono" pitchFamily="34" charset="0"/>
+                <a:ea typeface="Cascadia Mono" pitchFamily="34" charset="-122"/>
+                <a:cs typeface="Cascadia Mono" pitchFamily="34" charset="-120"/>
+              </a:rPr>
+              <a:t>model = LogisticRegression(max_iter=1000)</a:t>
+            </a:r>
+            <a:endParaRPr lang="en-US" sz="850" dirty="0"/>
+          </a:p>
+          <a:p>
+            <a:pPr marL="0" indent="0">
+              <a:buNone/>
+            </a:pPr>
+            <a:r>
+              <a:rPr lang="en-US" sz="850" dirty="0">
+                <a:solidFill>
+                  <a:srgbClr val="E5E7EB"/>
+                </a:solidFill>
+                <a:latin typeface="Cascadia Mono" pitchFamily="34" charset="0"/>
+                <a:ea typeface="Cascadia Mono" pitchFamily="34" charset="-122"/>
+                <a:cs typeface="Cascadia Mono" pitchFamily="34" charset="-120"/>
+              </a:rPr>
+              <a:t>model.fit(X_train, y_train)</a:t>
+            </a:r>
+            <a:endParaRPr lang="en-US" sz="850" dirty="0"/>
+          </a:p>
+          <a:p>
+            <a:pPr marL="0" indent="0">
+              <a:buNone/>
+            </a:pPr>
+            <a:r>
+              <a:rPr lang="en-US" sz="850" dirty="0">
+                <a:solidFill>
+                  <a:srgbClr val="E5E7EB"/>
+                </a:solidFill>
+                <a:latin typeface="Cascadia Mono" pitchFamily="34" charset="0"/>
+                <a:ea typeface="Cascadia Mono" pitchFamily="34" charset="-122"/>
+                <a:cs typeface="Cascadia Mono" pitchFamily="34" charset="-120"/>
+              </a:rPr>
+              <a:t>pred = model.predict(X_test)</a:t>
+            </a:r>
+            <a:endParaRPr lang="en-US" sz="850" dirty="0"/>
+          </a:p>
+          <a:p>
+            <a:pPr marL="0" indent="0">
+              <a:buNone/>
+            </a:pPr>
+            <a:endParaRPr lang="en-US" sz="850" dirty="0"/>
+          </a:p>
+          <a:p>
+            <a:pPr marL="0" indent="0">
+              <a:buNone/>
+            </a:pPr>
+            <a:r>
+              <a:rPr lang="en-US" sz="850" dirty="0">
+                <a:solidFill>
+                  <a:srgbClr val="E5E7EB"/>
+                </a:solidFill>
+                <a:latin typeface="Cascadia Mono" pitchFamily="34" charset="0"/>
+                <a:ea typeface="Cascadia Mono" pitchFamily="34" charset="-122"/>
+                <a:cs typeface="Cascadia Mono" pitchFamily="34" charset="-120"/>
+              </a:rPr>
+              <a:t>recall = recall_score(y_test, pred)</a:t>
+            </a:r>
+            <a:endParaRPr lang="en-US" sz="850" dirty="0"/>
+          </a:p>
+          <a:p>
+            <a:pPr marL="0" indent="0">
+              <a:buNone/>
+            </a:pPr>
+            <a:r>
+              <a:rPr lang="en-US" sz="850" dirty="0">
+                <a:solidFill>
+                  <a:srgbClr val="E5E7EB"/>
+                </a:solidFill>
+                <a:latin typeface="Cascadia Mono" pitchFamily="34" charset="0"/>
+                <a:ea typeface="Cascadia Mono" pitchFamily="34" charset="-122"/>
+                <a:cs typeface="Cascadia Mono" pitchFamily="34" charset="-120"/>
+              </a:rPr>
+              <a:t>f1 = f1_score(y_test, pred)</a:t>
+            </a:r>
+            <a:endParaRPr lang="en-US" sz="850" dirty="0"/>
+          </a:p>
+        </p:txBody>
+      </p:sp>
+      <p:sp>
+        <p:nvSpPr>
+          <p:cNvPr id="35" name="Text 6">
+            <a:extLst>
+              <a:ext uri="{FF2B5EF4-FFF2-40B4-BE49-F238E27FC236}">
+                <a16:creationId xmlns:a16="http://schemas.microsoft.com/office/drawing/2014/main" id="{FD705D23-ACC3-76CF-8771-450A1460CEEC}"/>
+              </a:ext>
+            </a:extLst>
+          </p:cNvPr>
+          <p:cNvSpPr/>
+          <p:nvPr/>
+        </p:nvSpPr>
+        <p:spPr>
+          <a:xfrm>
+            <a:off x="822960" y="4642327"/>
+            <a:ext cx="5303520" cy="1325880"/>
+          </a:xfrm>
+          <a:prstGeom prst="rect">
+            <a:avLst/>
+          </a:prstGeom>
+          <a:noFill/>
+          <a:ln/>
+        </p:spPr>
+        <p:txBody>
+          <a:bodyPr wrap="square" lIns="508" tIns="508" rIns="508" bIns="508" rtlCol="0" anchor="t">
             <a:normAutofit/>
           </a:bodyPr>
           <a:lstStyle/>
           <a:p>
-            <a:pPr marL="0" indent="0" algn="l">
-              <a:buNone/>
-            </a:pPr>
-            <a:r>
-              <a:rPr lang="en-US" sz="1500" dirty="0">
-                <a:solidFill>
-                  <a:srgbClr val="1F2937"/>
-                </a:solidFill>
-              </a:rPr>
-              <a:t>Classify occupancy state, energy anomaly, or equipment fault from time and sensor data.</a:t>
-            </a:r>
-            <a:endParaRPr lang="en-US" sz="1500" dirty="0"/>
-          </a:p>
-        </p:txBody>
-      </p:sp>
-      <p:sp>
-        <p:nvSpPr>
-          <p:cNvPr id="14" name="Shape 12"/>
-          <p:cNvSpPr/>
-          <p:nvPr/>
-        </p:nvSpPr>
-        <p:spPr>
-          <a:xfrm>
-            <a:off x="822960" y="3383280"/>
-            <a:ext cx="10515600" cy="0"/>
-          </a:xfrm>
-          <a:prstGeom prst="line">
-            <a:avLst/>
-          </a:prstGeom>
-          <a:noFill/>
-          <a:ln w="10160">
+            <a:pPr marL="152400" indent="-152400">
+              <a:buSzPct val="100000"/>
+              <a:buChar char="•"/>
+            </a:pPr>
+            <a:r>
+              <a:rPr lang="en-US" sz="1250" dirty="0">
+                <a:solidFill>
+                  <a:srgbClr val="4B5563"/>
+                </a:solidFill>
+                <a:latin typeface="Aptos" pitchFamily="34" charset="0"/>
+                <a:ea typeface="Aptos" pitchFamily="34" charset="-122"/>
+                <a:cs typeface="Aptos" pitchFamily="34" charset="-120"/>
+              </a:rPr>
+              <a:t>Accuracy: overall proportion correct</a:t>
+            </a:r>
+            <a:endParaRPr lang="en-US" sz="1250" dirty="0"/>
+          </a:p>
+          <a:p>
+            <a:pPr marL="152400" indent="-152400">
+              <a:buSzPct val="100000"/>
+              <a:buChar char="•"/>
+            </a:pPr>
+            <a:r>
+              <a:rPr lang="en-US" sz="1250" dirty="0">
+                <a:solidFill>
+                  <a:srgbClr val="4B5563"/>
+                </a:solidFill>
+                <a:latin typeface="Aptos" pitchFamily="34" charset="0"/>
+                <a:ea typeface="Aptos" pitchFamily="34" charset="-122"/>
+                <a:cs typeface="Aptos" pitchFamily="34" charset="-120"/>
+              </a:rPr>
+              <a:t>Precision: when model flags a defect, how often is it right?</a:t>
+            </a:r>
+            <a:endParaRPr lang="en-US" sz="1250" dirty="0"/>
+          </a:p>
+          <a:p>
+            <a:pPr marL="152400" indent="-152400">
+              <a:buSzPct val="100000"/>
+              <a:buChar char="•"/>
+            </a:pPr>
+            <a:r>
+              <a:rPr lang="en-US" sz="1250" dirty="0">
+                <a:solidFill>
+                  <a:srgbClr val="4B5563"/>
+                </a:solidFill>
+                <a:latin typeface="Aptos" pitchFamily="34" charset="0"/>
+                <a:ea typeface="Aptos" pitchFamily="34" charset="-122"/>
+                <a:cs typeface="Aptos" pitchFamily="34" charset="-120"/>
+              </a:rPr>
+              <a:t>Recall: of all true defects, how many were found?</a:t>
+            </a:r>
+            <a:endParaRPr lang="en-US" sz="1250" dirty="0"/>
+          </a:p>
+          <a:p>
+            <a:pPr marL="152400" indent="-152400">
+              <a:buSzPct val="100000"/>
+              <a:buChar char="•"/>
+            </a:pPr>
+            <a:r>
+              <a:rPr lang="en-US" sz="1250" dirty="0">
+                <a:solidFill>
+                  <a:srgbClr val="4B5563"/>
+                </a:solidFill>
+                <a:latin typeface="Aptos" pitchFamily="34" charset="0"/>
+                <a:ea typeface="Aptos" pitchFamily="34" charset="-122"/>
+                <a:cs typeface="Aptos" pitchFamily="34" charset="-120"/>
+              </a:rPr>
+              <a:t>F1-score: balance of precision and recall</a:t>
+            </a:r>
+            <a:endParaRPr lang="en-US" sz="1250" dirty="0"/>
+          </a:p>
+        </p:txBody>
+      </p:sp>
+      <p:sp>
+        <p:nvSpPr>
+          <p:cNvPr id="37" name="Shape 7">
+            <a:extLst>
+              <a:ext uri="{FF2B5EF4-FFF2-40B4-BE49-F238E27FC236}">
+                <a16:creationId xmlns:a16="http://schemas.microsoft.com/office/drawing/2014/main" id="{5E683041-30B2-08D3-DF2F-08300F4EC5AD}"/>
+              </a:ext>
+            </a:extLst>
+          </p:cNvPr>
+          <p:cNvSpPr/>
+          <p:nvPr/>
+        </p:nvSpPr>
+        <p:spPr>
+          <a:xfrm>
+            <a:off x="6309360" y="4779487"/>
+            <a:ext cx="1417320" cy="292608"/>
+          </a:xfrm>
+          <a:prstGeom prst="roundRect">
+            <a:avLst>
+              <a:gd name="adj" fmla="val 25000"/>
+            </a:avLst>
+          </a:prstGeom>
+          <a:solidFill>
+            <a:srgbClr val="166534"/>
+          </a:solidFill>
+          <a:ln w="12700">
             <a:solidFill>
-              <a:srgbClr val="E5E7EB"/>
+              <a:srgbClr val="166534"/>
             </a:solidFill>
             <a:prstDash val="solid"/>
           </a:ln>
@@ -7398,226 +7756,20 @@
       </p:sp>
       <p:sp>
         <p:nvSpPr>
-          <p:cNvPr id="15" name="Text 13"/>
-          <p:cNvSpPr/>
-          <p:nvPr/>
-        </p:nvSpPr>
-        <p:spPr>
-          <a:xfrm>
-            <a:off x="868680" y="3794760"/>
-            <a:ext cx="1508760" cy="256032"/>
-          </a:xfrm>
-          <a:prstGeom prst="rect">
-            <a:avLst/>
-          </a:prstGeom>
-          <a:noFill/>
-          <a:ln/>
-        </p:spPr>
-        <p:txBody>
-          <a:bodyPr wrap="square" lIns="254" tIns="254" rIns="254" bIns="254" rtlCol="0" anchor="t">
-            <a:normAutofit/>
-          </a:bodyPr>
-          <a:lstStyle/>
-          <a:p>
-            <a:pPr marL="0" indent="0" algn="l">
-              <a:buNone/>
-            </a:pPr>
-            <a:r>
-              <a:rPr lang="en-US" sz="1600" b="1" dirty="0">
-                <a:solidFill>
-                  <a:srgbClr val="C8102E"/>
-                </a:solidFill>
-              </a:rPr>
-              <a:t>Education</a:t>
-            </a:r>
-            <a:endParaRPr lang="en-US" sz="1600" dirty="0"/>
-          </a:p>
-        </p:txBody>
-      </p:sp>
-      <p:sp>
-        <p:nvSpPr>
-          <p:cNvPr id="16" name="Text 14"/>
-          <p:cNvSpPr/>
-          <p:nvPr/>
-        </p:nvSpPr>
-        <p:spPr>
-          <a:xfrm>
-            <a:off x="3154680" y="3794760"/>
-            <a:ext cx="7772400" cy="292608"/>
-          </a:xfrm>
-          <a:prstGeom prst="rect">
-            <a:avLst/>
-          </a:prstGeom>
-          <a:noFill/>
-          <a:ln/>
-        </p:spPr>
-        <p:txBody>
-          <a:bodyPr wrap="square" lIns="254" tIns="254" rIns="254" bIns="254" rtlCol="0" anchor="t">
-            <a:normAutofit/>
-          </a:bodyPr>
-          <a:lstStyle/>
-          <a:p>
-            <a:pPr marL="0" indent="0" algn="l">
-              <a:buNone/>
-            </a:pPr>
-            <a:r>
-              <a:rPr lang="en-US" sz="1500" dirty="0">
-                <a:solidFill>
-                  <a:srgbClr val="1F2937"/>
-                </a:solidFill>
-              </a:rPr>
-              <a:t>Classify early support need or course outcome from activity and performance indicators.</a:t>
-            </a:r>
-            <a:endParaRPr lang="en-US" sz="1500" dirty="0"/>
-          </a:p>
-        </p:txBody>
-      </p:sp>
-      <p:sp>
-        <p:nvSpPr>
-          <p:cNvPr id="17" name="Shape 15"/>
-          <p:cNvSpPr/>
-          <p:nvPr/>
-        </p:nvSpPr>
-        <p:spPr>
-          <a:xfrm>
-            <a:off x="822960" y="4206240"/>
-            <a:ext cx="10515600" cy="0"/>
-          </a:xfrm>
-          <a:prstGeom prst="line">
-            <a:avLst/>
-          </a:prstGeom>
-          <a:noFill/>
-          <a:ln w="10160">
-            <a:solidFill>
-              <a:srgbClr val="E5E7EB"/>
-            </a:solidFill>
-            <a:prstDash val="solid"/>
-          </a:ln>
-        </p:spPr>
-        <p:txBody>
-          <a:bodyPr/>
-          <a:lstStyle/>
-          <a:p>
-            <a:endParaRPr lang="en-US"/>
-          </a:p>
-        </p:txBody>
-      </p:sp>
-      <p:sp>
-        <p:nvSpPr>
-          <p:cNvPr id="18" name="Text 16"/>
-          <p:cNvSpPr/>
-          <p:nvPr/>
-        </p:nvSpPr>
-        <p:spPr>
-          <a:xfrm>
-            <a:off x="868680" y="4617720"/>
-            <a:ext cx="1508760" cy="256032"/>
-          </a:xfrm>
-          <a:prstGeom prst="rect">
-            <a:avLst/>
-          </a:prstGeom>
-          <a:noFill/>
-          <a:ln/>
-        </p:spPr>
-        <p:txBody>
-          <a:bodyPr wrap="square" lIns="254" tIns="254" rIns="254" bIns="254" rtlCol="0" anchor="t">
-            <a:normAutofit fontScale="85000" lnSpcReduction="10000"/>
-          </a:bodyPr>
-          <a:lstStyle/>
-          <a:p>
-            <a:pPr marL="0" indent="0" algn="l">
-              <a:buNone/>
-            </a:pPr>
-            <a:r>
-              <a:rPr lang="en-US" sz="1600" b="1" dirty="0">
-                <a:solidFill>
-                  <a:srgbClr val="C8102E"/>
-                </a:solidFill>
-              </a:rPr>
-              <a:t>Equipment health</a:t>
-            </a:r>
-            <a:endParaRPr lang="en-US" sz="1600" dirty="0"/>
-          </a:p>
-        </p:txBody>
-      </p:sp>
-      <p:sp>
-        <p:nvSpPr>
-          <p:cNvPr id="19" name="Text 17"/>
-          <p:cNvSpPr/>
-          <p:nvPr/>
-        </p:nvSpPr>
-        <p:spPr>
-          <a:xfrm>
-            <a:off x="3154680" y="4617720"/>
-            <a:ext cx="7772400" cy="292608"/>
-          </a:xfrm>
-          <a:prstGeom prst="rect">
-            <a:avLst/>
-          </a:prstGeom>
-          <a:noFill/>
-          <a:ln/>
-        </p:spPr>
-        <p:txBody>
-          <a:bodyPr wrap="square" lIns="254" tIns="254" rIns="254" bIns="254" rtlCol="0" anchor="t">
-            <a:normAutofit/>
-          </a:bodyPr>
-          <a:lstStyle/>
-          <a:p>
-            <a:pPr marL="0" indent="0" algn="l">
-              <a:buNone/>
-            </a:pPr>
-            <a:r>
-              <a:rPr lang="en-US" sz="1500" dirty="0">
-                <a:solidFill>
-                  <a:srgbClr val="1F2937"/>
-                </a:solidFill>
-              </a:rPr>
-              <a:t>Classify normal, warning, and fault states from vibration, current, temperature, and runtime.</a:t>
-            </a:r>
-            <a:endParaRPr lang="en-US" sz="1500" dirty="0"/>
-          </a:p>
-        </p:txBody>
-      </p:sp>
-      <p:sp>
-        <p:nvSpPr>
-          <p:cNvPr id="20" name="Shape 18"/>
-          <p:cNvSpPr/>
-          <p:nvPr/>
-        </p:nvSpPr>
-        <p:spPr>
-          <a:xfrm>
-            <a:off x="822960" y="5029200"/>
-            <a:ext cx="10515600" cy="0"/>
-          </a:xfrm>
-          <a:prstGeom prst="line">
-            <a:avLst/>
-          </a:prstGeom>
-          <a:noFill/>
-          <a:ln w="10160">
-            <a:solidFill>
-              <a:srgbClr val="E5E7EB"/>
-            </a:solidFill>
-            <a:prstDash val="solid"/>
-          </a:ln>
-        </p:spPr>
-        <p:txBody>
-          <a:bodyPr/>
-          <a:lstStyle/>
-          <a:p>
-            <a:endParaRPr lang="en-US"/>
-          </a:p>
-        </p:txBody>
-      </p:sp>
-      <p:sp>
-        <p:nvSpPr>
-          <p:cNvPr id="23" name="Text 21"/>
-          <p:cNvSpPr/>
-          <p:nvPr/>
-        </p:nvSpPr>
-        <p:spPr>
-          <a:xfrm>
-            <a:off x="11539728" y="6446520"/>
-            <a:ext cx="274320" cy="182880"/>
+          <p:cNvPr id="39" name="Text 8">
+            <a:extLst>
+              <a:ext uri="{FF2B5EF4-FFF2-40B4-BE49-F238E27FC236}">
+                <a16:creationId xmlns:a16="http://schemas.microsoft.com/office/drawing/2014/main" id="{98C1297D-0D89-0D6E-E6D1-4E97EEE319ED}"/>
+              </a:ext>
+            </a:extLst>
+          </p:cNvPr>
+          <p:cNvSpPr/>
+          <p:nvPr/>
+        </p:nvSpPr>
+        <p:spPr>
+          <a:xfrm>
+            <a:off x="6309360" y="4848067"/>
+            <a:ext cx="1417320" cy="128016"/>
           </a:xfrm>
           <a:prstGeom prst="rect">
             <a:avLst/>
@@ -7629,18 +7781,63 @@
           <a:bodyPr wrap="square" lIns="0" tIns="0" rIns="0" bIns="0" rtlCol="0" anchor="ctr"/>
           <a:lstStyle/>
           <a:p>
-            <a:pPr marL="0" indent="0" algn="r">
-              <a:buNone/>
-            </a:pPr>
-            <a:r>
-              <a:rPr lang="en-US" sz="800" dirty="0">
-                <a:solidFill>
-                  <a:srgbClr val="9CA3AF"/>
-                </a:solidFill>
-              </a:rPr>
-              <a:t>15</a:t>
-            </a:r>
-            <a:endParaRPr lang="en-US" sz="800" dirty="0"/>
+            <a:pPr marL="0" indent="0" algn="ctr">
+              <a:buNone/>
+            </a:pPr>
+            <a:r>
+              <a:rPr lang="en-US" sz="850" b="1" dirty="0">
+                <a:solidFill>
+                  <a:srgbClr val="FFFFFF"/>
+                </a:solidFill>
+              </a:rPr>
+              <a:t>Session 4 notebook</a:t>
+            </a:r>
+            <a:endParaRPr lang="en-US" sz="850" dirty="0"/>
+          </a:p>
+        </p:txBody>
+      </p:sp>
+      <p:sp>
+        <p:nvSpPr>
+          <p:cNvPr id="41" name="Text 9">
+            <a:extLst>
+              <a:ext uri="{FF2B5EF4-FFF2-40B4-BE49-F238E27FC236}">
+                <a16:creationId xmlns:a16="http://schemas.microsoft.com/office/drawing/2014/main" id="{096B0486-D30C-A995-B11E-2CB2DE700C2A}"/>
+              </a:ext>
+            </a:extLst>
+          </p:cNvPr>
+          <p:cNvSpPr/>
+          <p:nvPr/>
+        </p:nvSpPr>
+        <p:spPr>
+          <a:xfrm>
+            <a:off x="7891272" y="4816063"/>
+            <a:ext cx="3840480" cy="164592"/>
+          </a:xfrm>
+          <a:prstGeom prst="rect">
+            <a:avLst/>
+          </a:prstGeom>
+          <a:noFill/>
+          <a:ln/>
+        </p:spPr>
+        <p:txBody>
+          <a:bodyPr wrap="square" lIns="0" tIns="0" rIns="0" bIns="0" rtlCol="0" anchor="ctr"/>
+          <a:lstStyle/>
+          <a:p>
+            <a:pPr marL="0" indent="0">
+              <a:buNone/>
+            </a:pPr>
+            <a:r>
+              <a:rPr lang="en-US" sz="1120" dirty="0">
+                <a:solidFill>
+                  <a:srgbClr val="111827"/>
+                </a:solidFill>
+                <a:latin typeface="Cascadia Mono" pitchFamily="34" charset="0"/>
+                <a:ea typeface="Cascadia Mono" pitchFamily="34" charset="-122"/>
+                <a:cs typeface="Cascadia Mono" pitchFamily="34" charset="-120"/>
+              </a:rPr>
+              <a:t>04_session4_classification_sklearn.ipynb</a:t>
+            </a:r>
+            <a:endParaRPr lang="en-US" sz="1120" dirty="0"/>
           </a:p>
         </p:txBody>
       </p:sp>
@@ -7653,6 +7850,1138 @@
 </file>
 
 <file path=ppt/slides/slide16.xml><?xml version="1.0" encoding="utf-8"?>
+<p:sld xmlns:a="http://schemas.openxmlformats.org/drawingml/2006/main" xmlns:r="http://schemas.openxmlformats.org/officeDocument/2006/relationships" xmlns:p="http://schemas.openxmlformats.org/presentationml/2006/main">
+  <p:cSld>
+    <p:bg>
+      <p:bgPr>
+        <a:solidFill>
+          <a:srgbClr val="FBFBFC"/>
+        </a:solidFill>
+        <a:effectLst/>
+      </p:bgPr>
+    </p:bg>
+    <p:spTree>
+      <p:nvGrpSpPr>
+        <p:cNvPr id="1" name="">
+          <a:extLst>
+            <a:ext uri="{FF2B5EF4-FFF2-40B4-BE49-F238E27FC236}">
+              <a16:creationId xmlns:a16="http://schemas.microsoft.com/office/drawing/2014/main" id="{933A7D4B-73FE-DFE4-3EA0-CA0718102C02}"/>
+            </a:ext>
+          </a:extLst>
+        </p:cNvPr>
+        <p:cNvGrpSpPr/>
+        <p:nvPr/>
+      </p:nvGrpSpPr>
+      <p:grpSpPr>
+        <a:xfrm>
+          <a:off x="0" y="0"/>
+          <a:ext cx="0" cy="0"/>
+          <a:chOff x="0" y="0"/>
+          <a:chExt cx="0" cy="0"/>
+        </a:xfrm>
+      </p:grpSpPr>
+      <p:sp>
+        <p:nvSpPr>
+          <p:cNvPr id="2" name="Shape 0">
+            <a:extLst>
+              <a:ext uri="{FF2B5EF4-FFF2-40B4-BE49-F238E27FC236}">
+                <a16:creationId xmlns:a16="http://schemas.microsoft.com/office/drawing/2014/main" id="{FFF4934D-A2ED-93A7-A941-F08ACF3A66CB}"/>
+              </a:ext>
+            </a:extLst>
+          </p:cNvPr>
+          <p:cNvSpPr/>
+          <p:nvPr/>
+        </p:nvSpPr>
+        <p:spPr>
+          <a:xfrm>
+            <a:off x="0" y="0"/>
+            <a:ext cx="12191695" cy="201168"/>
+          </a:xfrm>
+          <a:prstGeom prst="rect">
+            <a:avLst/>
+          </a:prstGeom>
+          <a:solidFill>
+            <a:srgbClr val="C8102E"/>
+          </a:solidFill>
+          <a:ln w="12700">
+            <a:solidFill>
+              <a:srgbClr val="C8102E">
+                <a:alpha val="0"/>
+              </a:srgbClr>
+            </a:solidFill>
+            <a:prstDash val="solid"/>
+          </a:ln>
+        </p:spPr>
+        <p:txBody>
+          <a:bodyPr/>
+          <a:lstStyle/>
+          <a:p>
+            <a:endParaRPr lang="en-US"/>
+          </a:p>
+        </p:txBody>
+      </p:sp>
+      <p:sp>
+        <p:nvSpPr>
+          <p:cNvPr id="3" name="Text 1">
+            <a:extLst>
+              <a:ext uri="{FF2B5EF4-FFF2-40B4-BE49-F238E27FC236}">
+                <a16:creationId xmlns:a16="http://schemas.microsoft.com/office/drawing/2014/main" id="{E0BC13B1-2D88-E431-0A59-C216C45E8F69}"/>
+              </a:ext>
+            </a:extLst>
+          </p:cNvPr>
+          <p:cNvSpPr/>
+          <p:nvPr/>
+        </p:nvSpPr>
+        <p:spPr>
+          <a:xfrm>
+            <a:off x="502920" y="338328"/>
+            <a:ext cx="4572000" cy="201168"/>
+          </a:xfrm>
+          <a:prstGeom prst="rect">
+            <a:avLst/>
+          </a:prstGeom>
+          <a:noFill/>
+          <a:ln/>
+        </p:spPr>
+        <p:txBody>
+          <a:bodyPr wrap="square" lIns="0" tIns="0" rIns="0" bIns="0" rtlCol="0" anchor="ctr"/>
+          <a:lstStyle/>
+          <a:p>
+            <a:pPr marL="0" indent="0">
+              <a:buNone/>
+            </a:pPr>
+            <a:r>
+              <a:rPr lang="en-US" sz="750" b="1" dirty="0">
+                <a:solidFill>
+                  <a:srgbClr val="6B7280"/>
+                </a:solidFill>
+                <a:latin typeface="Aptos" pitchFamily="34" charset="0"/>
+                <a:ea typeface="Aptos" pitchFamily="34" charset="-122"/>
+                <a:cs typeface="Aptos" pitchFamily="34" charset="-120"/>
+              </a:rPr>
+              <a:t>APPLIED AI DESIGN WORKSHOP</a:t>
+            </a:r>
+            <a:endParaRPr lang="en-US" sz="750" dirty="0"/>
+          </a:p>
+        </p:txBody>
+      </p:sp>
+      <p:sp>
+        <p:nvSpPr>
+          <p:cNvPr id="5" name="Text 3">
+            <a:extLst>
+              <a:ext uri="{FF2B5EF4-FFF2-40B4-BE49-F238E27FC236}">
+                <a16:creationId xmlns:a16="http://schemas.microsoft.com/office/drawing/2014/main" id="{807BCBF1-FDF8-F2A6-AE9C-574E8070BC3D}"/>
+              </a:ext>
+            </a:extLst>
+          </p:cNvPr>
+          <p:cNvSpPr/>
+          <p:nvPr/>
+        </p:nvSpPr>
+        <p:spPr>
+          <a:xfrm>
+            <a:off x="10561320" y="420624"/>
+            <a:ext cx="1097280" cy="292608"/>
+          </a:xfrm>
+          <a:prstGeom prst="rect">
+            <a:avLst/>
+          </a:prstGeom>
+          <a:noFill/>
+          <a:ln/>
+        </p:spPr>
+        <p:txBody>
+          <a:bodyPr wrap="square" lIns="0" tIns="0" rIns="0" bIns="0" rtlCol="0" anchor="ctr"/>
+          <a:lstStyle/>
+          <a:p>
+            <a:pPr marL="0" indent="0" algn="r">
+              <a:buNone/>
+            </a:pPr>
+            <a:r>
+              <a:rPr lang="en-US" sz="1000" dirty="0">
+                <a:solidFill>
+                  <a:srgbClr val="6B7280"/>
+                </a:solidFill>
+              </a:rPr>
+              <a:t>Session 4</a:t>
+            </a:r>
+            <a:endParaRPr lang="en-US" sz="1000" dirty="0"/>
+          </a:p>
+        </p:txBody>
+      </p:sp>
+      <p:sp>
+        <p:nvSpPr>
+          <p:cNvPr id="23" name="Text 21">
+            <a:extLst>
+              <a:ext uri="{FF2B5EF4-FFF2-40B4-BE49-F238E27FC236}">
+                <a16:creationId xmlns:a16="http://schemas.microsoft.com/office/drawing/2014/main" id="{DF6AEAC6-3348-290A-35B4-F23607E3FC7B}"/>
+              </a:ext>
+            </a:extLst>
+          </p:cNvPr>
+          <p:cNvSpPr/>
+          <p:nvPr/>
+        </p:nvSpPr>
+        <p:spPr>
+          <a:xfrm>
+            <a:off x="11539728" y="6446520"/>
+            <a:ext cx="274320" cy="182880"/>
+          </a:xfrm>
+          <a:prstGeom prst="rect">
+            <a:avLst/>
+          </a:prstGeom>
+          <a:noFill/>
+          <a:ln/>
+        </p:spPr>
+        <p:txBody>
+          <a:bodyPr wrap="square" lIns="0" tIns="0" rIns="0" bIns="0" rtlCol="0" anchor="ctr"/>
+          <a:lstStyle/>
+          <a:p>
+            <a:pPr marL="0" indent="0" algn="r">
+              <a:buNone/>
+            </a:pPr>
+            <a:r>
+              <a:rPr lang="en-US" sz="800" dirty="0">
+                <a:solidFill>
+                  <a:srgbClr val="9CA3AF"/>
+                </a:solidFill>
+              </a:rPr>
+              <a:t>15</a:t>
+            </a:r>
+            <a:endParaRPr lang="en-US" sz="800" dirty="0"/>
+          </a:p>
+        </p:txBody>
+      </p:sp>
+      <p:sp>
+        <p:nvSpPr>
+          <p:cNvPr id="6" name="Text 0">
+            <a:extLst>
+              <a:ext uri="{FF2B5EF4-FFF2-40B4-BE49-F238E27FC236}">
+                <a16:creationId xmlns:a16="http://schemas.microsoft.com/office/drawing/2014/main" id="{84CCDA0A-1AE3-2399-BB72-64F5F8BFCA9F}"/>
+              </a:ext>
+            </a:extLst>
+          </p:cNvPr>
+          <p:cNvSpPr/>
+          <p:nvPr/>
+        </p:nvSpPr>
+        <p:spPr>
+          <a:xfrm>
+            <a:off x="484632" y="1444752"/>
+            <a:ext cx="10789920" cy="457200"/>
+          </a:xfrm>
+          <a:prstGeom prst="rect">
+            <a:avLst/>
+          </a:prstGeom>
+          <a:noFill/>
+          <a:ln/>
+        </p:spPr>
+        <p:txBody>
+          <a:bodyPr wrap="square" lIns="0" tIns="0" rIns="0" bIns="0" rtlCol="0" anchor="ctr">
+            <a:normAutofit/>
+          </a:bodyPr>
+          <a:lstStyle/>
+          <a:p>
+            <a:pPr marL="0" indent="0">
+              <a:buNone/>
+            </a:pPr>
+            <a:r>
+              <a:rPr lang="en-US" sz="2500" b="1" dirty="0">
+                <a:solidFill>
+                  <a:srgbClr val="12355B"/>
+                </a:solidFill>
+                <a:latin typeface="Aptos Display" pitchFamily="34" charset="0"/>
+                <a:ea typeface="Aptos Display" pitchFamily="34" charset="-122"/>
+                <a:cs typeface="Aptos Display" pitchFamily="34" charset="-120"/>
+              </a:rPr>
+              <a:t>Classification interpretation: inspect the confusion matrix</a:t>
+            </a:r>
+            <a:endParaRPr lang="en-US" sz="2500" dirty="0"/>
+          </a:p>
+        </p:txBody>
+      </p:sp>
+      <p:sp>
+        <p:nvSpPr>
+          <p:cNvPr id="8" name="Text 1">
+            <a:extLst>
+              <a:ext uri="{FF2B5EF4-FFF2-40B4-BE49-F238E27FC236}">
+                <a16:creationId xmlns:a16="http://schemas.microsoft.com/office/drawing/2014/main" id="{B77A401E-7B26-2A9B-CA28-298415AA09B7}"/>
+              </a:ext>
+            </a:extLst>
+          </p:cNvPr>
+          <p:cNvSpPr/>
+          <p:nvPr/>
+        </p:nvSpPr>
+        <p:spPr>
+          <a:xfrm>
+            <a:off x="502920" y="1965960"/>
+            <a:ext cx="10241280" cy="320040"/>
+          </a:xfrm>
+          <a:prstGeom prst="rect">
+            <a:avLst/>
+          </a:prstGeom>
+          <a:noFill/>
+          <a:ln/>
+        </p:spPr>
+        <p:txBody>
+          <a:bodyPr wrap="square" lIns="0" tIns="0" rIns="0" bIns="0" rtlCol="0" anchor="ctr">
+            <a:normAutofit/>
+          </a:bodyPr>
+          <a:lstStyle/>
+          <a:p>
+            <a:pPr marL="0" indent="0">
+              <a:buNone/>
+            </a:pPr>
+            <a:r>
+              <a:rPr lang="en-US" sz="1150" dirty="0">
+                <a:solidFill>
+                  <a:srgbClr val="4B5563"/>
+                </a:solidFill>
+              </a:rPr>
+              <a:t>The preferred metric depends on the consequence of each error type.</a:t>
+            </a:r>
+            <a:endParaRPr lang="en-US" sz="1150" dirty="0"/>
+          </a:p>
+        </p:txBody>
+      </p:sp>
+      <p:sp>
+        <p:nvSpPr>
+          <p:cNvPr id="10" name="Text 2">
+            <a:extLst>
+              <a:ext uri="{FF2B5EF4-FFF2-40B4-BE49-F238E27FC236}">
+                <a16:creationId xmlns:a16="http://schemas.microsoft.com/office/drawing/2014/main" id="{87B41922-1E21-EB95-1F15-EA0669631D41}"/>
+              </a:ext>
+            </a:extLst>
+          </p:cNvPr>
+          <p:cNvSpPr/>
+          <p:nvPr/>
+        </p:nvSpPr>
+        <p:spPr>
+          <a:xfrm>
+            <a:off x="941832" y="2633472"/>
+            <a:ext cx="2148840" cy="777240"/>
+          </a:xfrm>
+          <a:prstGeom prst="rect">
+            <a:avLst/>
+          </a:prstGeom>
+          <a:noFill/>
+          <a:ln/>
+        </p:spPr>
+        <p:txBody>
+          <a:bodyPr wrap="square" lIns="0" tIns="0" rIns="0" bIns="0" rtlCol="0" anchor="ctr"/>
+          <a:lstStyle/>
+          <a:p>
+            <a:pPr marL="0" indent="0">
+              <a:buNone/>
+            </a:pPr>
+            <a:endParaRPr lang="en-US" dirty="0"/>
+          </a:p>
+        </p:txBody>
+      </p:sp>
+      <p:sp>
+        <p:nvSpPr>
+          <p:cNvPr id="12" name="Text 3">
+            <a:extLst>
+              <a:ext uri="{FF2B5EF4-FFF2-40B4-BE49-F238E27FC236}">
+                <a16:creationId xmlns:a16="http://schemas.microsoft.com/office/drawing/2014/main" id="{0650BA5A-12DF-0364-E4A5-7DAC1B423640}"/>
+              </a:ext>
+            </a:extLst>
+          </p:cNvPr>
+          <p:cNvSpPr/>
+          <p:nvPr/>
+        </p:nvSpPr>
+        <p:spPr>
+          <a:xfrm>
+            <a:off x="3090672" y="2633472"/>
+            <a:ext cx="2148840" cy="777240"/>
+          </a:xfrm>
+          <a:prstGeom prst="rect">
+            <a:avLst/>
+          </a:prstGeom>
+          <a:noFill/>
+          <a:ln/>
+        </p:spPr>
+        <p:txBody>
+          <a:bodyPr wrap="square" lIns="254" tIns="254" rIns="254" bIns="254" rtlCol="0" anchor="ctr"/>
+          <a:lstStyle/>
+          <a:p>
+            <a:pPr marL="0" indent="0" algn="ctr">
+              <a:buNone/>
+            </a:pPr>
+            <a:r>
+              <a:rPr lang="en-US" sz="1200" b="1" dirty="0">
+                <a:solidFill>
+                  <a:srgbClr val="12355B"/>
+                </a:solidFill>
+              </a:rPr>
+              <a:t>Predicted acceptable</a:t>
+            </a:r>
+            <a:endParaRPr lang="en-US" sz="1200" dirty="0"/>
+          </a:p>
+        </p:txBody>
+      </p:sp>
+      <p:sp>
+        <p:nvSpPr>
+          <p:cNvPr id="14" name="Text 4">
+            <a:extLst>
+              <a:ext uri="{FF2B5EF4-FFF2-40B4-BE49-F238E27FC236}">
+                <a16:creationId xmlns:a16="http://schemas.microsoft.com/office/drawing/2014/main" id="{50D76049-8B97-A4A8-BC50-0D3171B53B3A}"/>
+              </a:ext>
+            </a:extLst>
+          </p:cNvPr>
+          <p:cNvSpPr/>
+          <p:nvPr/>
+        </p:nvSpPr>
+        <p:spPr>
+          <a:xfrm>
+            <a:off x="5239512" y="2633472"/>
+            <a:ext cx="2148840" cy="777240"/>
+          </a:xfrm>
+          <a:prstGeom prst="rect">
+            <a:avLst/>
+          </a:prstGeom>
+          <a:noFill/>
+          <a:ln/>
+        </p:spPr>
+        <p:txBody>
+          <a:bodyPr wrap="square" lIns="254" tIns="254" rIns="254" bIns="254" rtlCol="0" anchor="ctr"/>
+          <a:lstStyle/>
+          <a:p>
+            <a:pPr marL="0" indent="0" algn="ctr">
+              <a:buNone/>
+            </a:pPr>
+            <a:r>
+              <a:rPr lang="en-US" sz="1200" b="1" dirty="0">
+                <a:solidFill>
+                  <a:srgbClr val="12355B"/>
+                </a:solidFill>
+              </a:rPr>
+              <a:t>Predicted defect</a:t>
+            </a:r>
+            <a:endParaRPr lang="en-US" sz="1200" dirty="0"/>
+          </a:p>
+        </p:txBody>
+      </p:sp>
+      <p:sp>
+        <p:nvSpPr>
+          <p:cNvPr id="16" name="Text 5">
+            <a:extLst>
+              <a:ext uri="{FF2B5EF4-FFF2-40B4-BE49-F238E27FC236}">
+                <a16:creationId xmlns:a16="http://schemas.microsoft.com/office/drawing/2014/main" id="{4EDBB19D-5D94-0920-93AD-7083983FC5C9}"/>
+              </a:ext>
+            </a:extLst>
+          </p:cNvPr>
+          <p:cNvSpPr/>
+          <p:nvPr/>
+        </p:nvSpPr>
+        <p:spPr>
+          <a:xfrm>
+            <a:off x="941832" y="3410712"/>
+            <a:ext cx="2148840" cy="777240"/>
+          </a:xfrm>
+          <a:prstGeom prst="rect">
+            <a:avLst/>
+          </a:prstGeom>
+          <a:noFill/>
+          <a:ln/>
+        </p:spPr>
+        <p:txBody>
+          <a:bodyPr wrap="square" lIns="254" tIns="254" rIns="254" bIns="254" rtlCol="0" anchor="ctr"/>
+          <a:lstStyle/>
+          <a:p>
+            <a:pPr marL="0" indent="0" algn="ctr">
+              <a:buNone/>
+            </a:pPr>
+            <a:r>
+              <a:rPr lang="en-US" sz="1200" b="1" dirty="0">
+                <a:solidFill>
+                  <a:srgbClr val="12355B"/>
+                </a:solidFill>
+              </a:rPr>
+              <a:t>Actual acceptable</a:t>
+            </a:r>
+            <a:endParaRPr lang="en-US" sz="1200" dirty="0"/>
+          </a:p>
+        </p:txBody>
+      </p:sp>
+      <p:sp>
+        <p:nvSpPr>
+          <p:cNvPr id="18" name="Text 6">
+            <a:extLst>
+              <a:ext uri="{FF2B5EF4-FFF2-40B4-BE49-F238E27FC236}">
+                <a16:creationId xmlns:a16="http://schemas.microsoft.com/office/drawing/2014/main" id="{4B8E5963-8082-9CFF-5E2F-B39586924EDA}"/>
+              </a:ext>
+            </a:extLst>
+          </p:cNvPr>
+          <p:cNvSpPr/>
+          <p:nvPr/>
+        </p:nvSpPr>
+        <p:spPr>
+          <a:xfrm>
+            <a:off x="3090672" y="3410712"/>
+            <a:ext cx="2148840" cy="777240"/>
+          </a:xfrm>
+          <a:prstGeom prst="rect">
+            <a:avLst/>
+          </a:prstGeom>
+          <a:noFill/>
+          <a:ln/>
+        </p:spPr>
+        <p:txBody>
+          <a:bodyPr wrap="square" lIns="254" tIns="254" rIns="254" bIns="254" rtlCol="0" anchor="ctr"/>
+          <a:lstStyle/>
+          <a:p>
+            <a:pPr marL="0" indent="0" algn="ctr">
+              <a:buNone/>
+            </a:pPr>
+            <a:r>
+              <a:rPr lang="en-US" sz="1500" b="1" dirty="0">
+                <a:solidFill>
+                  <a:srgbClr val="166534"/>
+                </a:solidFill>
+              </a:rPr>
+              <a:t>True Negative</a:t>
+            </a:r>
+            <a:endParaRPr lang="en-US" sz="1500" dirty="0"/>
+          </a:p>
+        </p:txBody>
+      </p:sp>
+      <p:sp>
+        <p:nvSpPr>
+          <p:cNvPr id="20" name="Text 7">
+            <a:extLst>
+              <a:ext uri="{FF2B5EF4-FFF2-40B4-BE49-F238E27FC236}">
+                <a16:creationId xmlns:a16="http://schemas.microsoft.com/office/drawing/2014/main" id="{00EA9DF9-D7BA-C362-C00A-E263A7270C4E}"/>
+              </a:ext>
+            </a:extLst>
+          </p:cNvPr>
+          <p:cNvSpPr/>
+          <p:nvPr/>
+        </p:nvSpPr>
+        <p:spPr>
+          <a:xfrm>
+            <a:off x="5239512" y="3410712"/>
+            <a:ext cx="2148840" cy="777240"/>
+          </a:xfrm>
+          <a:prstGeom prst="rect">
+            <a:avLst/>
+          </a:prstGeom>
+          <a:noFill/>
+          <a:ln/>
+        </p:spPr>
+        <p:txBody>
+          <a:bodyPr wrap="square" lIns="254" tIns="254" rIns="254" bIns="254" rtlCol="0" anchor="ctr"/>
+          <a:lstStyle/>
+          <a:p>
+            <a:pPr marL="0" indent="0" algn="ctr">
+              <a:buNone/>
+            </a:pPr>
+            <a:r>
+              <a:rPr lang="en-US" sz="1500" b="1" dirty="0">
+                <a:solidFill>
+                  <a:srgbClr val="F97316"/>
+                </a:solidFill>
+              </a:rPr>
+              <a:t>False Positive</a:t>
+            </a:r>
+            <a:endParaRPr lang="en-US" sz="1500" dirty="0"/>
+          </a:p>
+        </p:txBody>
+      </p:sp>
+      <p:sp>
+        <p:nvSpPr>
+          <p:cNvPr id="24" name="Text 8">
+            <a:extLst>
+              <a:ext uri="{FF2B5EF4-FFF2-40B4-BE49-F238E27FC236}">
+                <a16:creationId xmlns:a16="http://schemas.microsoft.com/office/drawing/2014/main" id="{E262C08D-C311-DB50-93E5-079F6E40F006}"/>
+              </a:ext>
+            </a:extLst>
+          </p:cNvPr>
+          <p:cNvSpPr/>
+          <p:nvPr/>
+        </p:nvSpPr>
+        <p:spPr>
+          <a:xfrm>
+            <a:off x="941832" y="4187952"/>
+            <a:ext cx="2148840" cy="777240"/>
+          </a:xfrm>
+          <a:prstGeom prst="rect">
+            <a:avLst/>
+          </a:prstGeom>
+          <a:noFill/>
+          <a:ln/>
+        </p:spPr>
+        <p:txBody>
+          <a:bodyPr wrap="square" lIns="254" tIns="254" rIns="254" bIns="254" rtlCol="0" anchor="ctr"/>
+          <a:lstStyle/>
+          <a:p>
+            <a:pPr marL="0" indent="0" algn="ctr">
+              <a:buNone/>
+            </a:pPr>
+            <a:r>
+              <a:rPr lang="en-US" sz="1200" b="1" dirty="0">
+                <a:solidFill>
+                  <a:srgbClr val="12355B"/>
+                </a:solidFill>
+              </a:rPr>
+              <a:t>Actual defect</a:t>
+            </a:r>
+            <a:endParaRPr lang="en-US" sz="1200" dirty="0"/>
+          </a:p>
+        </p:txBody>
+      </p:sp>
+      <p:sp>
+        <p:nvSpPr>
+          <p:cNvPr id="28" name="Text 9">
+            <a:extLst>
+              <a:ext uri="{FF2B5EF4-FFF2-40B4-BE49-F238E27FC236}">
+                <a16:creationId xmlns:a16="http://schemas.microsoft.com/office/drawing/2014/main" id="{4067B905-0F1E-BA8E-29E9-26CB3CFE0D4C}"/>
+              </a:ext>
+            </a:extLst>
+          </p:cNvPr>
+          <p:cNvSpPr/>
+          <p:nvPr/>
+        </p:nvSpPr>
+        <p:spPr>
+          <a:xfrm>
+            <a:off x="3090672" y="4187952"/>
+            <a:ext cx="2148840" cy="777240"/>
+          </a:xfrm>
+          <a:prstGeom prst="rect">
+            <a:avLst/>
+          </a:prstGeom>
+          <a:noFill/>
+          <a:ln/>
+        </p:spPr>
+        <p:txBody>
+          <a:bodyPr wrap="square" lIns="254" tIns="254" rIns="254" bIns="254" rtlCol="0" anchor="ctr"/>
+          <a:lstStyle/>
+          <a:p>
+            <a:pPr marL="0" indent="0" algn="ctr">
+              <a:buNone/>
+            </a:pPr>
+            <a:r>
+              <a:rPr lang="en-US" sz="1500" b="1" dirty="0">
+                <a:solidFill>
+                  <a:srgbClr val="F97316"/>
+                </a:solidFill>
+              </a:rPr>
+              <a:t>False Negative</a:t>
+            </a:r>
+            <a:endParaRPr lang="en-US" sz="1500" dirty="0"/>
+          </a:p>
+        </p:txBody>
+      </p:sp>
+      <p:sp>
+        <p:nvSpPr>
+          <p:cNvPr id="32" name="Text 10">
+            <a:extLst>
+              <a:ext uri="{FF2B5EF4-FFF2-40B4-BE49-F238E27FC236}">
+                <a16:creationId xmlns:a16="http://schemas.microsoft.com/office/drawing/2014/main" id="{A7B7C6A8-1E6A-FCB2-FD71-DEDAF7A65353}"/>
+              </a:ext>
+            </a:extLst>
+          </p:cNvPr>
+          <p:cNvSpPr/>
+          <p:nvPr/>
+        </p:nvSpPr>
+        <p:spPr>
+          <a:xfrm>
+            <a:off x="5239512" y="4187952"/>
+            <a:ext cx="2148840" cy="777240"/>
+          </a:xfrm>
+          <a:prstGeom prst="rect">
+            <a:avLst/>
+          </a:prstGeom>
+          <a:noFill/>
+          <a:ln/>
+        </p:spPr>
+        <p:txBody>
+          <a:bodyPr wrap="square" lIns="254" tIns="254" rIns="254" bIns="254" rtlCol="0" anchor="ctr"/>
+          <a:lstStyle/>
+          <a:p>
+            <a:pPr marL="0" indent="0" algn="ctr">
+              <a:buNone/>
+            </a:pPr>
+            <a:r>
+              <a:rPr lang="en-US" sz="1500" b="1" dirty="0">
+                <a:solidFill>
+                  <a:srgbClr val="166534"/>
+                </a:solidFill>
+              </a:rPr>
+              <a:t>True Positive</a:t>
+            </a:r>
+            <a:endParaRPr lang="en-US" sz="1500" dirty="0"/>
+          </a:p>
+        </p:txBody>
+      </p:sp>
+      <p:sp>
+        <p:nvSpPr>
+          <p:cNvPr id="36" name="Shape 11">
+            <a:extLst>
+              <a:ext uri="{FF2B5EF4-FFF2-40B4-BE49-F238E27FC236}">
+                <a16:creationId xmlns:a16="http://schemas.microsoft.com/office/drawing/2014/main" id="{7298AABF-6F09-B2BC-DEB5-43190CB3C02B}"/>
+              </a:ext>
+            </a:extLst>
+          </p:cNvPr>
+          <p:cNvSpPr/>
+          <p:nvPr/>
+        </p:nvSpPr>
+        <p:spPr>
+          <a:xfrm>
+            <a:off x="941832" y="2633472"/>
+            <a:ext cx="0" cy="2331720"/>
+          </a:xfrm>
+          <a:prstGeom prst="line">
+            <a:avLst/>
+          </a:prstGeom>
+          <a:noFill/>
+          <a:ln w="12700">
+            <a:solidFill>
+              <a:srgbClr val="D7DEE8"/>
+            </a:solidFill>
+            <a:prstDash val="solid"/>
+          </a:ln>
+        </p:spPr>
+        <p:txBody>
+          <a:bodyPr/>
+          <a:lstStyle/>
+          <a:p>
+            <a:endParaRPr lang="en-US"/>
+          </a:p>
+        </p:txBody>
+      </p:sp>
+      <p:sp>
+        <p:nvSpPr>
+          <p:cNvPr id="40" name="Shape 12">
+            <a:extLst>
+              <a:ext uri="{FF2B5EF4-FFF2-40B4-BE49-F238E27FC236}">
+                <a16:creationId xmlns:a16="http://schemas.microsoft.com/office/drawing/2014/main" id="{BD4D6ED5-B03C-6027-410F-6D4E60A97DEB}"/>
+              </a:ext>
+            </a:extLst>
+          </p:cNvPr>
+          <p:cNvSpPr/>
+          <p:nvPr/>
+        </p:nvSpPr>
+        <p:spPr>
+          <a:xfrm>
+            <a:off x="3090672" y="2633472"/>
+            <a:ext cx="0" cy="2331720"/>
+          </a:xfrm>
+          <a:prstGeom prst="line">
+            <a:avLst/>
+          </a:prstGeom>
+          <a:noFill/>
+          <a:ln w="12700">
+            <a:solidFill>
+              <a:srgbClr val="D7DEE8"/>
+            </a:solidFill>
+            <a:prstDash val="solid"/>
+          </a:ln>
+        </p:spPr>
+        <p:txBody>
+          <a:bodyPr/>
+          <a:lstStyle/>
+          <a:p>
+            <a:endParaRPr lang="en-US"/>
+          </a:p>
+        </p:txBody>
+      </p:sp>
+      <p:sp>
+        <p:nvSpPr>
+          <p:cNvPr id="43" name="Shape 13">
+            <a:extLst>
+              <a:ext uri="{FF2B5EF4-FFF2-40B4-BE49-F238E27FC236}">
+                <a16:creationId xmlns:a16="http://schemas.microsoft.com/office/drawing/2014/main" id="{DDFCF22C-9FD7-B0B3-B7BA-B674A716D418}"/>
+              </a:ext>
+            </a:extLst>
+          </p:cNvPr>
+          <p:cNvSpPr/>
+          <p:nvPr/>
+        </p:nvSpPr>
+        <p:spPr>
+          <a:xfrm>
+            <a:off x="5239512" y="2633472"/>
+            <a:ext cx="0" cy="2331720"/>
+          </a:xfrm>
+          <a:prstGeom prst="line">
+            <a:avLst/>
+          </a:prstGeom>
+          <a:noFill/>
+          <a:ln w="12700">
+            <a:solidFill>
+              <a:srgbClr val="D7DEE8"/>
+            </a:solidFill>
+            <a:prstDash val="solid"/>
+          </a:ln>
+        </p:spPr>
+        <p:txBody>
+          <a:bodyPr/>
+          <a:lstStyle/>
+          <a:p>
+            <a:endParaRPr lang="en-US"/>
+          </a:p>
+        </p:txBody>
+      </p:sp>
+      <p:sp>
+        <p:nvSpPr>
+          <p:cNvPr id="45" name="Shape 14">
+            <a:extLst>
+              <a:ext uri="{FF2B5EF4-FFF2-40B4-BE49-F238E27FC236}">
+                <a16:creationId xmlns:a16="http://schemas.microsoft.com/office/drawing/2014/main" id="{4C540DDE-9382-A687-CE7B-CEC81D381AC9}"/>
+              </a:ext>
+            </a:extLst>
+          </p:cNvPr>
+          <p:cNvSpPr/>
+          <p:nvPr/>
+        </p:nvSpPr>
+        <p:spPr>
+          <a:xfrm>
+            <a:off x="7388352" y="2633472"/>
+            <a:ext cx="0" cy="2331720"/>
+          </a:xfrm>
+          <a:prstGeom prst="line">
+            <a:avLst/>
+          </a:prstGeom>
+          <a:noFill/>
+          <a:ln w="12700">
+            <a:solidFill>
+              <a:srgbClr val="D7DEE8"/>
+            </a:solidFill>
+            <a:prstDash val="solid"/>
+          </a:ln>
+        </p:spPr>
+        <p:txBody>
+          <a:bodyPr/>
+          <a:lstStyle/>
+          <a:p>
+            <a:endParaRPr lang="en-US"/>
+          </a:p>
+        </p:txBody>
+      </p:sp>
+      <p:sp>
+        <p:nvSpPr>
+          <p:cNvPr id="47" name="Shape 15">
+            <a:extLst>
+              <a:ext uri="{FF2B5EF4-FFF2-40B4-BE49-F238E27FC236}">
+                <a16:creationId xmlns:a16="http://schemas.microsoft.com/office/drawing/2014/main" id="{03FBBA7A-A6C2-8034-979D-7418CDA0C7E9}"/>
+              </a:ext>
+            </a:extLst>
+          </p:cNvPr>
+          <p:cNvSpPr/>
+          <p:nvPr/>
+        </p:nvSpPr>
+        <p:spPr>
+          <a:xfrm>
+            <a:off x="941832" y="2633472"/>
+            <a:ext cx="6446520" cy="0"/>
+          </a:xfrm>
+          <a:prstGeom prst="line">
+            <a:avLst/>
+          </a:prstGeom>
+          <a:noFill/>
+          <a:ln w="12700">
+            <a:solidFill>
+              <a:srgbClr val="D7DEE8"/>
+            </a:solidFill>
+            <a:prstDash val="solid"/>
+          </a:ln>
+        </p:spPr>
+        <p:txBody>
+          <a:bodyPr/>
+          <a:lstStyle/>
+          <a:p>
+            <a:endParaRPr lang="en-US"/>
+          </a:p>
+        </p:txBody>
+      </p:sp>
+      <p:sp>
+        <p:nvSpPr>
+          <p:cNvPr id="49" name="Shape 16">
+            <a:extLst>
+              <a:ext uri="{FF2B5EF4-FFF2-40B4-BE49-F238E27FC236}">
+                <a16:creationId xmlns:a16="http://schemas.microsoft.com/office/drawing/2014/main" id="{93F997C3-09CF-80B1-B628-416BF1823458}"/>
+              </a:ext>
+            </a:extLst>
+          </p:cNvPr>
+          <p:cNvSpPr/>
+          <p:nvPr/>
+        </p:nvSpPr>
+        <p:spPr>
+          <a:xfrm>
+            <a:off x="941832" y="3410712"/>
+            <a:ext cx="6446520" cy="0"/>
+          </a:xfrm>
+          <a:prstGeom prst="line">
+            <a:avLst/>
+          </a:prstGeom>
+          <a:noFill/>
+          <a:ln w="12700">
+            <a:solidFill>
+              <a:srgbClr val="D7DEE8"/>
+            </a:solidFill>
+            <a:prstDash val="solid"/>
+          </a:ln>
+        </p:spPr>
+        <p:txBody>
+          <a:bodyPr/>
+          <a:lstStyle/>
+          <a:p>
+            <a:endParaRPr lang="en-US"/>
+          </a:p>
+        </p:txBody>
+      </p:sp>
+      <p:sp>
+        <p:nvSpPr>
+          <p:cNvPr id="51" name="Shape 17">
+            <a:extLst>
+              <a:ext uri="{FF2B5EF4-FFF2-40B4-BE49-F238E27FC236}">
+                <a16:creationId xmlns:a16="http://schemas.microsoft.com/office/drawing/2014/main" id="{507FF472-ECC8-528B-FCD7-DDDE4D91531F}"/>
+              </a:ext>
+            </a:extLst>
+          </p:cNvPr>
+          <p:cNvSpPr/>
+          <p:nvPr/>
+        </p:nvSpPr>
+        <p:spPr>
+          <a:xfrm>
+            <a:off x="941832" y="4187952"/>
+            <a:ext cx="6446520" cy="0"/>
+          </a:xfrm>
+          <a:prstGeom prst="line">
+            <a:avLst/>
+          </a:prstGeom>
+          <a:noFill/>
+          <a:ln w="12700">
+            <a:solidFill>
+              <a:srgbClr val="D7DEE8"/>
+            </a:solidFill>
+            <a:prstDash val="solid"/>
+          </a:ln>
+        </p:spPr>
+        <p:txBody>
+          <a:bodyPr/>
+          <a:lstStyle/>
+          <a:p>
+            <a:endParaRPr lang="en-US"/>
+          </a:p>
+        </p:txBody>
+      </p:sp>
+      <p:sp>
+        <p:nvSpPr>
+          <p:cNvPr id="53" name="Shape 18">
+            <a:extLst>
+              <a:ext uri="{FF2B5EF4-FFF2-40B4-BE49-F238E27FC236}">
+                <a16:creationId xmlns:a16="http://schemas.microsoft.com/office/drawing/2014/main" id="{868A57AF-90E2-784C-3957-1015CA9C3030}"/>
+              </a:ext>
+            </a:extLst>
+          </p:cNvPr>
+          <p:cNvSpPr/>
+          <p:nvPr/>
+        </p:nvSpPr>
+        <p:spPr>
+          <a:xfrm>
+            <a:off x="941832" y="4965192"/>
+            <a:ext cx="6446520" cy="0"/>
+          </a:xfrm>
+          <a:prstGeom prst="line">
+            <a:avLst/>
+          </a:prstGeom>
+          <a:noFill/>
+          <a:ln w="12700">
+            <a:solidFill>
+              <a:srgbClr val="D7DEE8"/>
+            </a:solidFill>
+            <a:prstDash val="solid"/>
+          </a:ln>
+        </p:spPr>
+        <p:txBody>
+          <a:bodyPr/>
+          <a:lstStyle/>
+          <a:p>
+            <a:endParaRPr lang="en-US"/>
+          </a:p>
+        </p:txBody>
+      </p:sp>
+      <p:sp>
+        <p:nvSpPr>
+          <p:cNvPr id="55" name="Text 19">
+            <a:extLst>
+              <a:ext uri="{FF2B5EF4-FFF2-40B4-BE49-F238E27FC236}">
+                <a16:creationId xmlns:a16="http://schemas.microsoft.com/office/drawing/2014/main" id="{897A8950-0AE8-36BC-6335-9BCBEDC1F3DA}"/>
+              </a:ext>
+            </a:extLst>
+          </p:cNvPr>
+          <p:cNvSpPr/>
+          <p:nvPr/>
+        </p:nvSpPr>
+        <p:spPr>
+          <a:xfrm>
+            <a:off x="7662672" y="2724912"/>
+            <a:ext cx="3474720" cy="256032"/>
+          </a:xfrm>
+          <a:prstGeom prst="rect">
+            <a:avLst/>
+          </a:prstGeom>
+          <a:noFill/>
+          <a:ln/>
+        </p:spPr>
+        <p:txBody>
+          <a:bodyPr wrap="square" lIns="0" tIns="0" rIns="0" bIns="0" rtlCol="0" anchor="ctr"/>
+          <a:lstStyle/>
+          <a:p>
+            <a:pPr marL="0" indent="0">
+              <a:buNone/>
+            </a:pPr>
+            <a:r>
+              <a:rPr lang="en-US" sz="1500" b="1" dirty="0">
+                <a:solidFill>
+                  <a:srgbClr val="166534"/>
+                </a:solidFill>
+              </a:rPr>
+              <a:t>Instructor prompt</a:t>
+            </a:r>
+            <a:endParaRPr lang="en-US" sz="1500" dirty="0"/>
+          </a:p>
+        </p:txBody>
+      </p:sp>
+      <p:sp>
+        <p:nvSpPr>
+          <p:cNvPr id="57" name="Text 20">
+            <a:extLst>
+              <a:ext uri="{FF2B5EF4-FFF2-40B4-BE49-F238E27FC236}">
+                <a16:creationId xmlns:a16="http://schemas.microsoft.com/office/drawing/2014/main" id="{52AB11F2-F477-72A3-8D6F-2B0F9D657784}"/>
+              </a:ext>
+            </a:extLst>
+          </p:cNvPr>
+          <p:cNvSpPr/>
+          <p:nvPr/>
+        </p:nvSpPr>
+        <p:spPr>
+          <a:xfrm>
+            <a:off x="7662672" y="3063240"/>
+            <a:ext cx="3474720" cy="530352"/>
+          </a:xfrm>
+          <a:prstGeom prst="rect">
+            <a:avLst/>
+          </a:prstGeom>
+          <a:noFill/>
+          <a:ln/>
+        </p:spPr>
+        <p:txBody>
+          <a:bodyPr wrap="square" lIns="254" tIns="254" rIns="254" bIns="254" rtlCol="0" anchor="ctr">
+            <a:normAutofit/>
+          </a:bodyPr>
+          <a:lstStyle/>
+          <a:p>
+            <a:pPr marL="0" indent="0">
+              <a:buNone/>
+            </a:pPr>
+            <a:r>
+              <a:rPr lang="en-US" sz="1250" dirty="0">
+                <a:solidFill>
+                  <a:srgbClr val="4B5563"/>
+                </a:solidFill>
+              </a:rPr>
+              <a:t>“Which error matters more in this application: a false alarm or a missed defect?”</a:t>
+            </a:r>
+            <a:endParaRPr lang="en-US" sz="1250" dirty="0"/>
+          </a:p>
+        </p:txBody>
+      </p:sp>
+      <p:sp>
+        <p:nvSpPr>
+          <p:cNvPr id="59" name="Text 21">
+            <a:extLst>
+              <a:ext uri="{FF2B5EF4-FFF2-40B4-BE49-F238E27FC236}">
+                <a16:creationId xmlns:a16="http://schemas.microsoft.com/office/drawing/2014/main" id="{AD3F8897-3DB4-8FBF-6CD6-19A4ED3651F1}"/>
+              </a:ext>
+            </a:extLst>
+          </p:cNvPr>
+          <p:cNvSpPr/>
+          <p:nvPr/>
+        </p:nvSpPr>
+        <p:spPr>
+          <a:xfrm>
+            <a:off x="7662672" y="4005072"/>
+            <a:ext cx="3474720" cy="1097280"/>
+          </a:xfrm>
+          <a:prstGeom prst="rect">
+            <a:avLst/>
+          </a:prstGeom>
+          <a:noFill/>
+          <a:ln/>
+        </p:spPr>
+        <p:txBody>
+          <a:bodyPr wrap="square" lIns="508" tIns="508" rIns="508" bIns="508" rtlCol="0" anchor="t">
+            <a:normAutofit lnSpcReduction="10000"/>
+          </a:bodyPr>
+          <a:lstStyle/>
+          <a:p>
+            <a:pPr marL="152400" indent="-152400">
+              <a:buSzPct val="100000"/>
+              <a:buChar char="•"/>
+            </a:pPr>
+            <a:r>
+              <a:rPr lang="en-US" sz="1250" dirty="0">
+                <a:solidFill>
+                  <a:srgbClr val="4B5563"/>
+                </a:solidFill>
+                <a:latin typeface="Aptos" pitchFamily="34" charset="0"/>
+                <a:ea typeface="Aptos" pitchFamily="34" charset="-122"/>
+                <a:cs typeface="Aptos" pitchFamily="34" charset="-120"/>
+              </a:rPr>
+              <a:t>Accuracy can be misleading when defects are rare.</a:t>
+            </a:r>
+            <a:endParaRPr lang="en-US" sz="1250" dirty="0"/>
+          </a:p>
+          <a:p>
+            <a:pPr marL="152400" indent="-152400">
+              <a:buSzPct val="100000"/>
+              <a:buChar char="•"/>
+            </a:pPr>
+            <a:r>
+              <a:rPr lang="en-US" sz="1250" dirty="0">
+                <a:solidFill>
+                  <a:srgbClr val="4B5563"/>
+                </a:solidFill>
+                <a:latin typeface="Aptos" pitchFamily="34" charset="0"/>
+                <a:ea typeface="Aptos" pitchFamily="34" charset="-122"/>
+                <a:cs typeface="Aptos" pitchFamily="34" charset="-120"/>
+              </a:rPr>
+              <a:t>Recall is critical when missed defects are expensive.</a:t>
+            </a:r>
+            <a:endParaRPr lang="en-US" sz="1250" dirty="0"/>
+          </a:p>
+          <a:p>
+            <a:pPr marL="152400" indent="-152400">
+              <a:buSzPct val="100000"/>
+              <a:buChar char="•"/>
+            </a:pPr>
+            <a:r>
+              <a:rPr lang="en-US" sz="1250" dirty="0">
+                <a:solidFill>
+                  <a:srgbClr val="4B5563"/>
+                </a:solidFill>
+                <a:latin typeface="Aptos" pitchFamily="34" charset="0"/>
+                <a:ea typeface="Aptos" pitchFamily="34" charset="-122"/>
+                <a:cs typeface="Aptos" pitchFamily="34" charset="-120"/>
+              </a:rPr>
+              <a:t>Precision is critical when false alarms are expensive.</a:t>
+            </a:r>
+            <a:endParaRPr lang="en-US" sz="1250" dirty="0"/>
+          </a:p>
+        </p:txBody>
+      </p:sp>
+    </p:spTree>
+    <p:extLst>
+      <p:ext uri="{BB962C8B-B14F-4D97-AF65-F5344CB8AC3E}">
+        <p14:creationId xmlns:p14="http://schemas.microsoft.com/office/powerpoint/2010/main" val="1418429775"/>
+      </p:ext>
+    </p:extLst>
+  </p:cSld>
+  <p:clrMapOvr>
+    <a:masterClrMapping/>
+  </p:clrMapOvr>
+</p:sld>
+</file>
+
+<file path=ppt/slides/slide17.xml><?xml version="1.0" encoding="utf-8"?>
 <p:sld xmlns:a="http://schemas.openxmlformats.org/drawingml/2006/main" xmlns:r="http://schemas.openxmlformats.org/officeDocument/2006/relationships" xmlns:p="http://schemas.openxmlformats.org/presentationml/2006/main">
   <p:cSld name="Slide 16">
     <p:bg>
